--- a/skills/presentation-template-library/skills/artifact-template-coastal-analysis/assets/reference.pptx
+++ b/skills/presentation-template-library/skills/artifact-template-coastal-analysis/assets/reference.pptx
@@ -381,8 +381,8 @@
           <p:nvPr/>
         </p:nvPicPr>
         <p:blipFill>
-          <a:blip xmlns:r="http://schemas.openxmlformats.org/officeDocument/2006/relationships" xmlns:a="http://schemas.openxmlformats.org/drawingml/2006/main" r:embed="rIdOfficeKitImaged71bfa074cda59bb_1"/>
-          <a:srcRect xmlns:a="http://schemas.openxmlformats.org/drawingml/2006/main" l="0" t="34180" r="0" b="34180"/>
+          <a:blip xmlns:r="http://schemas.openxmlformats.org/officeDocument/2006/relationships" xmlns:a="http://schemas.openxmlformats.org/drawingml/2006/main" r:embed="rIdOfficeKitImagee4bd683f73b7a543_1"/>
+          <a:srcRect xmlns:a="http://schemas.openxmlformats.org/drawingml/2006/main" l="0" t="34171" r="0" b="34171"/>
           <a:stretch xmlns:a="http://schemas.openxmlformats.org/drawingml/2006/main">
             <a:fillRect/>
           </a:stretch>
@@ -2279,7 +2279,7 @@
         </p:xfrm>
         <a:graphic xmlns:a="http://schemas.openxmlformats.org/drawingml/2006/main">
           <a:graphicData uri="http://schemas.openxmlformats.org/drawingml/2006/chart">
-            <c:chart xmlns:r="http://schemas.openxmlformats.org/officeDocument/2006/relationships" xmlns:c="http://schemas.openxmlformats.org/drawingml/2006/chart" r:id="R67e5ed3171a6467f"/>
+            <c:chart xmlns:r="http://schemas.openxmlformats.org/officeDocument/2006/relationships" xmlns:c="http://schemas.openxmlformats.org/drawingml/2006/chart" r:id="R33b8f115cd814d30"/>
           </a:graphicData>
         </a:graphic>
       </p:graphicFrame>

--- a/skills/presentation-template-library/skills/artifact-template-coastal-analysis/assets/reference.pptx
+++ b/skills/presentation-template-library/skills/artifact-template-coastal-analysis/assets/reference.pptx
@@ -381,8 +381,8 @@
           <p:nvPr/>
         </p:nvPicPr>
         <p:blipFill>
-          <a:blip xmlns:r="http://schemas.openxmlformats.org/officeDocument/2006/relationships" xmlns:a="http://schemas.openxmlformats.org/drawingml/2006/main" r:embed="rIdOfficeKitImagee4bd683f73b7a543_1"/>
-          <a:srcRect xmlns:a="http://schemas.openxmlformats.org/drawingml/2006/main" l="0" t="34171" r="0" b="34171"/>
+          <a:blip xmlns:r="http://schemas.openxmlformats.org/officeDocument/2006/relationships" xmlns:a="http://schemas.openxmlformats.org/drawingml/2006/main" r:embed="rIdOfficeKitImageff1582c14d42a1a7_1"/>
+          <a:srcRect xmlns:a="http://schemas.openxmlformats.org/drawingml/2006/main" l="0" t="34180" r="0" b="34180"/>
           <a:stretch xmlns:a="http://schemas.openxmlformats.org/drawingml/2006/main">
             <a:fillRect/>
           </a:stretch>
@@ -2279,7 +2279,7 @@
         </p:xfrm>
         <a:graphic xmlns:a="http://schemas.openxmlformats.org/drawingml/2006/main">
           <a:graphicData uri="http://schemas.openxmlformats.org/drawingml/2006/chart">
-            <c:chart xmlns:r="http://schemas.openxmlformats.org/officeDocument/2006/relationships" xmlns:c="http://schemas.openxmlformats.org/drawingml/2006/chart" r:id="R33b8f115cd814d30"/>
+            <c:chart xmlns:r="http://schemas.openxmlformats.org/officeDocument/2006/relationships" xmlns:c="http://schemas.openxmlformats.org/drawingml/2006/chart" r:id="Rb5e3d77e43ad41f7"/>
           </a:graphicData>
         </a:graphic>
       </p:graphicFrame>

--- a/skills/presentation-template-library/skills/artifact-template-coastal-analysis/assets/reference.pptx
+++ b/skills/presentation-template-library/skills/artifact-template-coastal-analysis/assets/reference.pptx
@@ -354,6 +354,16 @@
 <file path=ppt/slides/slide1.xml><?xml version="1.0" encoding="utf-8"?>
 <p:sld xmlns:p="http://schemas.openxmlformats.org/presentationml/2006/main">
   <p:cSld name="Opening claim">
+    <p:bg>
+      <p:bgPr>
+        <a:blipFill xmlns:a="http://schemas.openxmlformats.org/drawingml/2006/main">
+          <a:blip xmlns:r="http://schemas.openxmlformats.org/officeDocument/2006/relationships" r:embed="rIdOfficeKitImageff1582c14d42a1a7_1"/>
+          <a:stretch>
+            <a:fillRect/>
+          </a:stretch>
+        </a:blipFill>
+      </p:bgPr>
+    </p:bg>
     <p:spTree>
       <p:nvGrpSpPr>
         <p:cNvPr id="1" name=""/>
@@ -368,38 +378,9 @@
           <a:chExt cx="0" cy="0"/>
         </a:xfrm>
       </p:grpSpPr>
-      <p:pic>
-        <p:nvPicPr>
-          <p:cNvPr id="2" name="artifact-template-coastal-analysis-cover-field">
-            <a:extLst xmlns:a="http://schemas.openxmlformats.org/drawingml/2006/main">
-              <a:ext uri="{C183D7F6-B498-43B3-948B-1728B52AA6E4}">
-                <adec:decorative xmlns:adec="http://schemas.microsoft.com/office/drawing/2017/decorative" val="1"/>
-              </a:ext>
-            </a:extLst>
-          </p:cNvPr>
-          <p:cNvPicPr/>
-          <p:nvPr/>
-        </p:nvPicPr>
-        <p:blipFill>
-          <a:blip xmlns:r="http://schemas.openxmlformats.org/officeDocument/2006/relationships" xmlns:a="http://schemas.openxmlformats.org/drawingml/2006/main" r:embed="rIdOfficeKitImageff1582c14d42a1a7_1"/>
-          <a:srcRect xmlns:a="http://schemas.openxmlformats.org/drawingml/2006/main" l="0" t="34180" r="0" b="34180"/>
-          <a:stretch xmlns:a="http://schemas.openxmlformats.org/drawingml/2006/main">
-            <a:fillRect/>
-          </a:stretch>
-        </p:blipFill>
-        <p:spPr>
-          <a:xfrm xmlns:a="http://schemas.openxmlformats.org/drawingml/2006/main">
-            <a:off x="0" y="0"/>
-            <a:ext cx="15240000" cy="8572500"/>
-          </a:xfrm>
-          <a:prstGeom xmlns:a="http://schemas.openxmlformats.org/drawingml/2006/main" prst="rect">
-            <a:avLst/>
-          </a:prstGeom>
-        </p:spPr>
-      </p:pic>
-      <p:sp>
-        <p:nvSpPr>
-          <p:cNvPr id="3" name="cover-paper-scrim"/>
+      <p:sp>
+        <p:nvSpPr>
+          <p:cNvPr id="2" name="cover-paper-scrim"/>
           <p:cNvSpPr/>
           <p:nvPr/>
         </p:nvSpPr>
@@ -437,7 +418,7 @@
       </p:sp>
       <p:sp>
         <p:nvSpPr>
-          <p:cNvPr id="4" name="top-rule"/>
+          <p:cNvPr id="3" name="top-rule"/>
           <p:cNvSpPr/>
           <p:nvPr/>
         </p:nvSpPr>
@@ -471,7 +452,7 @@
       </p:sp>
       <p:sp>
         <p:nvSpPr>
-          <p:cNvPr id="5" name="eyebrow"/>
+          <p:cNvPr id="4" name="eyebrow"/>
           <p:cNvSpPr txBox="1"/>
           <p:nvPr/>
         </p:nvSpPr>
@@ -508,7 +489,7 @@
       </p:sp>
       <p:sp>
         <p:nvSpPr>
-          <p:cNvPr id="6" name="cover-title"/>
+          <p:cNvPr id="5" name="cover-title"/>
           <p:cNvSpPr txBox="1"/>
           <p:nvPr/>
         </p:nvSpPr>
@@ -545,7 +526,7 @@
       </p:sp>
       <p:sp>
         <p:nvSpPr>
-          <p:cNvPr id="7" name="cover-subtitle"/>
+          <p:cNvPr id="6" name="cover-subtitle"/>
           <p:cNvSpPr txBox="1"/>
           <p:nvPr/>
         </p:nvSpPr>
@@ -582,7 +563,7 @@
       </p:sp>
       <p:sp>
         <p:nvSpPr>
-          <p:cNvPr id="8" name="cover-rule"/>
+          <p:cNvPr id="7" name="cover-rule"/>
           <p:cNvSpPr/>
           <p:nvPr/>
         </p:nvSpPr>
@@ -616,7 +597,7 @@
       </p:sp>
       <p:sp>
         <p:nvSpPr>
-          <p:cNvPr id="9" name="cover-basis"/>
+          <p:cNvPr id="8" name="cover-basis"/>
           <p:cNvSpPr txBox="1"/>
           <p:nvPr/>
         </p:nvSpPr>
@@ -653,7 +634,7 @@
       </p:sp>
       <p:sp>
         <p:nvSpPr>
-          <p:cNvPr id="10" name="cover-thesis"/>
+          <p:cNvPr id="9" name="cover-thesis"/>
           <p:cNvSpPr txBox="1"/>
           <p:nvPr/>
         </p:nvSpPr>
@@ -690,7 +671,7 @@
       </p:sp>
       <p:sp>
         <p:nvSpPr>
-          <p:cNvPr id="11" name="cover-source"/>
+          <p:cNvPr id="10" name="cover-source"/>
           <p:cNvSpPr txBox="1"/>
           <p:nvPr/>
         </p:nvSpPr>
@@ -727,7 +708,7 @@
       </p:sp>
       <p:sp>
         <p:nvSpPr>
-          <p:cNvPr id="12" name="page-number"/>
+          <p:cNvPr id="11" name="page-number"/>
           <p:cNvSpPr txBox="1"/>
           <p:nvPr/>
         </p:nvSpPr>
@@ -765,7 +746,7 @@
       </p:sp>
       <p:sp>
         <p:nvSpPr>
-          <p:cNvPr id="13" name="anchor-field"/>
+          <p:cNvPr id="12" name="anchor-field"/>
           <p:cNvSpPr/>
           <p:nvPr/>
         </p:nvSpPr>
@@ -801,7 +782,7 @@
       </p:sp>
       <p:sp>
         <p:nvSpPr>
-          <p:cNvPr id="14" name="anchor-line"/>
+          <p:cNvPr id="13" name="anchor-line"/>
           <p:cNvSpPr/>
           <p:nvPr/>
         </p:nvSpPr>
@@ -835,7 +816,7 @@
       </p:sp>
       <p:sp>
         <p:nvSpPr>
-          <p:cNvPr id="15" name="anchor-line-two"/>
+          <p:cNvPr id="14" name="anchor-line-two"/>
           <p:cNvSpPr/>
           <p:nvPr/>
         </p:nvSpPr>
@@ -869,7 +850,7 @@
       </p:sp>
       <p:sp>
         <p:nvSpPr>
-          <p:cNvPr id="16" name="anchor-dot"/>
+          <p:cNvPr id="15" name="anchor-dot"/>
           <p:cNvSpPr/>
           <p:nvPr/>
         </p:nvSpPr>
@@ -2279,7 +2260,7 @@
         </p:xfrm>
         <a:graphic xmlns:a="http://schemas.openxmlformats.org/drawingml/2006/main">
           <a:graphicData uri="http://schemas.openxmlformats.org/drawingml/2006/chart">
-            <c:chart xmlns:r="http://schemas.openxmlformats.org/officeDocument/2006/relationships" xmlns:c="http://schemas.openxmlformats.org/drawingml/2006/chart" r:id="Rb5e3d77e43ad41f7"/>
+            <c:chart xmlns:r="http://schemas.openxmlformats.org/officeDocument/2006/relationships" xmlns:c="http://schemas.openxmlformats.org/drawingml/2006/chart" r:id="Rf5743cd2879f4caa"/>
           </a:graphicData>
         </a:graphic>
       </p:graphicFrame>

--- a/skills/presentation-template-library/skills/artifact-template-coastal-analysis/assets/reference.pptx
+++ b/skills/presentation-template-library/skills/artifact-template-coastal-analysis/assets/reference.pptx
@@ -357,7 +357,7 @@
     <p:bg>
       <p:bgPr>
         <a:blipFill xmlns:a="http://schemas.openxmlformats.org/drawingml/2006/main">
-          <a:blip xmlns:r="http://schemas.openxmlformats.org/officeDocument/2006/relationships" r:embed="rIdOfficeKitImageff1582c14d42a1a7_1"/>
+          <a:blip xmlns:r="http://schemas.openxmlformats.org/officeDocument/2006/relationships" r:embed="rIdOfficeKitImage092dd3ee80187530_1"/>
           <a:stretch>
             <a:fillRect/>
           </a:stretch>
@@ -2260,7 +2260,7 @@
         </p:xfrm>
         <a:graphic xmlns:a="http://schemas.openxmlformats.org/drawingml/2006/main">
           <a:graphicData uri="http://schemas.openxmlformats.org/drawingml/2006/chart">
-            <c:chart xmlns:r="http://schemas.openxmlformats.org/officeDocument/2006/relationships" xmlns:c="http://schemas.openxmlformats.org/drawingml/2006/chart" r:id="Rf5743cd2879f4caa"/>
+            <c:chart xmlns:r="http://schemas.openxmlformats.org/officeDocument/2006/relationships" xmlns:c="http://schemas.openxmlformats.org/drawingml/2006/chart" r:id="R3d2daa19b25e4e9b"/>
           </a:graphicData>
         </a:graphic>
       </p:graphicFrame>
@@ -3722,6 +3722,16 @@
 <file path=ppt/slides/slide5.xml><?xml version="1.0" encoding="utf-8"?>
 <p:sld xmlns:p="http://schemas.openxmlformats.org/presentationml/2006/main">
   <p:cSld name="Visual carrier">
+    <p:bg>
+      <p:bgPr>
+        <a:blipFill xmlns:a="http://schemas.openxmlformats.org/drawingml/2006/main">
+          <a:blip xmlns:r="http://schemas.openxmlformats.org/officeDocument/2006/relationships" r:embed="rIdOfficeKitImage083106afebc7d419_1"/>
+          <a:stretch>
+            <a:fillRect/>
+          </a:stretch>
+        </a:blipFill>
+      </p:bgPr>
+    </p:bg>
     <p:spTree>
       <p:nvGrpSpPr>
         <p:cNvPr id="1" name=""/>
@@ -3738,20 +3748,22 @@
       </p:grpSpPr>
       <p:sp>
         <p:nvSpPr>
-          <p:cNvPr id="2" name="background"/>
+          <p:cNvPr id="2" name="section-reading-plane"/>
           <p:cNvSpPr/>
           <p:nvPr/>
         </p:nvSpPr>
         <p:spPr>
           <a:xfrm xmlns:a="http://schemas.openxmlformats.org/drawingml/2006/main">
             <a:off x="0" y="0"/>
-            <a:ext cx="15240000" cy="8572500"/>
+            <a:ext cx="7810500" cy="8572500"/>
           </a:xfrm>
           <a:prstGeom xmlns:a="http://schemas.openxmlformats.org/drawingml/2006/main" prst="rect">
             <a:avLst/>
           </a:prstGeom>
           <a:solidFill xmlns:a="http://schemas.openxmlformats.org/drawingml/2006/main">
-            <a:srgbClr val="FFFFFF"/>
+            <a:srgbClr val="FFFFFF">
+              <a:alpha val="90000"/>
+            </a:srgbClr>
           </a:solidFill>
           <a:ln xmlns:a="http://schemas.openxmlformats.org/drawingml/2006/main" w="0">
             <a:solidFill>
@@ -3774,14 +3786,88 @@
       </p:sp>
       <p:sp>
         <p:nvSpPr>
-          <p:cNvPr id="3" name="visual-top-rule"/>
+          <p:cNvPr id="3" name="section-eyebrow"/>
+          <p:cNvSpPr txBox="1"/>
+          <p:nvPr/>
+        </p:nvSpPr>
+        <p:spPr>
+          <a:xfrm xmlns:a="http://schemas.openxmlformats.org/drawingml/2006/main">
+            <a:off x="914400" y="914400"/>
+            <a:ext cx="6096000" cy="228600"/>
+          </a:xfrm>
+          <a:prstGeom xmlns:a="http://schemas.openxmlformats.org/drawingml/2006/main" prst="rect">
+            <a:avLst/>
+          </a:prstGeom>
+          <a:noFill xmlns:a="http://schemas.openxmlformats.org/drawingml/2006/main"/>
+          <a:ln xmlns:a="http://schemas.openxmlformats.org/drawingml/2006/main" w="0">
+            <a:noFill/>
+          </a:ln>
+        </p:spPr>
+        <p:txBody>
+          <a:bodyPr xmlns:a="http://schemas.openxmlformats.org/drawingml/2006/main" wrap="square" lIns="0" tIns="0" rIns="0" bIns="0" anchor="t"/>
+          <a:lstStyle xmlns:a="http://schemas.openxmlformats.org/drawingml/2006/main"/>
+          <a:p xmlns:a="http://schemas.openxmlformats.org/drawingml/2006/main">
+            <a:r>
+              <a:rPr lang="en-US" sz="1200" b="1">
+                <a:solidFill>
+                  <a:srgbClr val="0C9ED0"/>
+                </a:solidFill>
+                <a:latin typeface="Arial"/>
+                <a:ea typeface="Arial"/>
+              </a:rPr>
+              <a:t>COASTAL ANALYSIS · SECTION</a:t>
+            </a:r>
+            <a:endParaRPr lang="en-US"/>
+          </a:p>
+        </p:txBody>
+      </p:sp>
+      <p:sp>
+        <p:nvSpPr>
+          <p:cNvPr id="4" name="section-title"/>
+          <p:cNvSpPr txBox="1"/>
+          <p:nvPr/>
+        </p:nvSpPr>
+        <p:spPr>
+          <a:xfrm xmlns:a="http://schemas.openxmlformats.org/drawingml/2006/main">
+            <a:off x="914400" y="1657350"/>
+            <a:ext cx="5905500" cy="1162050"/>
+          </a:xfrm>
+          <a:prstGeom xmlns:a="http://schemas.openxmlformats.org/drawingml/2006/main" prst="rect">
+            <a:avLst/>
+          </a:prstGeom>
+          <a:noFill xmlns:a="http://schemas.openxmlformats.org/drawingml/2006/main"/>
+          <a:ln xmlns:a="http://schemas.openxmlformats.org/drawingml/2006/main" w="0">
+            <a:noFill/>
+          </a:ln>
+        </p:spPr>
+        <p:txBody>
+          <a:bodyPr xmlns:a="http://schemas.openxmlformats.org/drawingml/2006/main" wrap="square" lIns="0" tIns="0" rIns="0" bIns="0" anchor="t"/>
+          <a:lstStyle xmlns:a="http://schemas.openxmlformats.org/drawingml/2006/main"/>
+          <a:p xmlns:a="http://schemas.openxmlformats.org/drawingml/2006/main">
+            <a:r>
+              <a:rPr lang="en-US" sz="3450" b="1">
+                <a:solidFill>
+                  <a:srgbClr val="17324B"/>
+                </a:solidFill>
+                <a:latin typeface="Arial"/>
+                <a:ea typeface="Arial"/>
+              </a:rPr>
+              <a:t>Make the choice legible</a:t>
+            </a:r>
+            <a:endParaRPr lang="en-US"/>
+          </a:p>
+        </p:txBody>
+      </p:sp>
+      <p:sp>
+        <p:nvSpPr>
+          <p:cNvPr id="5" name="section-rule"/>
           <p:cNvSpPr/>
           <p:nvPr/>
         </p:nvSpPr>
         <p:spPr>
           <a:xfrm xmlns:a="http://schemas.openxmlformats.org/drawingml/2006/main">
-            <a:off x="838200" y="666750"/>
-            <a:ext cx="13563600" cy="0"/>
+            <a:off x="914400" y="3181350"/>
+            <a:ext cx="4991100" cy="0"/>
           </a:xfrm>
           <a:prstGeom xmlns:a="http://schemas.openxmlformats.org/drawingml/2006/main" prst="line">
             <a:avLst/>
@@ -3808,1070 +3894,118 @@
       </p:sp>
       <p:sp>
         <p:nvSpPr>
-          <p:cNvPr id="4" name="COASTAL ANALYSIS · VISUAL CARRIER"/>
-          <p:cNvSpPr txBox="1"/>
-          <p:nvPr/>
-        </p:nvSpPr>
-        <p:spPr>
-          <a:xfrm xmlns:a="http://schemas.openxmlformats.org/drawingml/2006/main">
-            <a:off x="914400" y="895350"/>
-            <a:ext cx="7239000" cy="228600"/>
-          </a:xfrm>
-          <a:prstGeom xmlns:a="http://schemas.openxmlformats.org/drawingml/2006/main" prst="rect">
-            <a:avLst/>
-          </a:prstGeom>
-          <a:noFill xmlns:a="http://schemas.openxmlformats.org/drawingml/2006/main"/>
-          <a:ln xmlns:a="http://schemas.openxmlformats.org/drawingml/2006/main" w="0">
-            <a:noFill/>
-          </a:ln>
-        </p:spPr>
-        <p:txBody>
-          <a:bodyPr xmlns:a="http://schemas.openxmlformats.org/drawingml/2006/main" wrap="square" lIns="0" tIns="0" rIns="0" bIns="0" anchor="t"/>
-          <a:lstStyle xmlns:a="http://schemas.openxmlformats.org/drawingml/2006/main"/>
-          <a:p xmlns:a="http://schemas.openxmlformats.org/drawingml/2006/main">
-            <a:r>
-              <a:rPr lang="en-US" sz="1200" b="1">
+          <p:cNvPr id="6" name="section-body"/>
+          <p:cNvSpPr txBox="1"/>
+          <p:nvPr/>
+        </p:nvSpPr>
+        <p:spPr>
+          <a:xfrm xmlns:a="http://schemas.openxmlformats.org/drawingml/2006/main">
+            <a:off x="914400" y="3600450"/>
+            <a:ext cx="5334000" cy="819150"/>
+          </a:xfrm>
+          <a:prstGeom xmlns:a="http://schemas.openxmlformats.org/drawingml/2006/main" prst="rect">
+            <a:avLst/>
+          </a:prstGeom>
+          <a:noFill xmlns:a="http://schemas.openxmlformats.org/drawingml/2006/main"/>
+          <a:ln xmlns:a="http://schemas.openxmlformats.org/drawingml/2006/main" w="0">
+            <a:noFill/>
+          </a:ln>
+        </p:spPr>
+        <p:txBody>
+          <a:bodyPr xmlns:a="http://schemas.openxmlformats.org/drawingml/2006/main" wrap="square" lIns="0" tIns="0" rIns="0" bIns="0" anchor="t"/>
+          <a:lstStyle xmlns:a="http://schemas.openxmlformats.org/drawingml/2006/main"/>
+          <a:p xmlns:a="http://schemas.openxmlformats.org/drawingml/2006/main">
+            <a:r>
+              <a:rPr lang="en-US" sz="1800">
+                <a:solidFill>
+                  <a:srgbClr val="17324B"/>
+                </a:solidFill>
+                <a:latin typeface="Arial"/>
+                <a:ea typeface="Arial"/>
+              </a:rPr>
+              <a:t>A single visual cue can make the recommendation easier to remember.</a:t>
+            </a:r>
+            <a:endParaRPr lang="en-US"/>
+          </a:p>
+        </p:txBody>
+      </p:sp>
+      <p:sp>
+        <p:nvSpPr>
+          <p:cNvPr id="7" name="section-note"/>
+          <p:cNvSpPr txBox="1"/>
+          <p:nvPr/>
+        </p:nvSpPr>
+        <p:spPr>
+          <a:xfrm xmlns:a="http://schemas.openxmlformats.org/drawingml/2006/main">
+            <a:off x="914400" y="5238750"/>
+            <a:ext cx="5334000" cy="228600"/>
+          </a:xfrm>
+          <a:prstGeom xmlns:a="http://schemas.openxmlformats.org/drawingml/2006/main" prst="rect">
+            <a:avLst/>
+          </a:prstGeom>
+          <a:noFill xmlns:a="http://schemas.openxmlformats.org/drawingml/2006/main"/>
+          <a:ln xmlns:a="http://schemas.openxmlformats.org/drawingml/2006/main" w="0">
+            <a:noFill/>
+          </a:ln>
+        </p:spPr>
+        <p:txBody>
+          <a:bodyPr xmlns:a="http://schemas.openxmlformats.org/drawingml/2006/main" wrap="square" lIns="0" tIns="0" rIns="0" bIns="0" anchor="t"/>
+          <a:lstStyle xmlns:a="http://schemas.openxmlformats.org/drawingml/2006/main"/>
+          <a:p xmlns:a="http://schemas.openxmlformats.org/drawingml/2006/main">
+            <a:r>
+              <a:rPr lang="en-US" sz="1125" b="1">
                 <a:solidFill>
                   <a:srgbClr val="0C9ED0"/>
                 </a:solidFill>
                 <a:latin typeface="Arial"/>
                 <a:ea typeface="Arial"/>
               </a:rPr>
-              <a:t>COASTAL ANALYSIS · VISUAL CARRIER</a:t>
-            </a:r>
-            <a:endParaRPr lang="en-US"/>
-          </a:p>
-        </p:txBody>
-      </p:sp>
-      <p:sp>
-        <p:nvSpPr>
-          <p:cNvPr id="5" name="visual-title"/>
-          <p:cNvSpPr txBox="1"/>
-          <p:nvPr/>
-        </p:nvSpPr>
-        <p:spPr>
-          <a:xfrm xmlns:a="http://schemas.openxmlformats.org/drawingml/2006/main">
-            <a:off x="914400" y="1314450"/>
-            <a:ext cx="11811000" cy="552450"/>
-          </a:xfrm>
-          <a:prstGeom xmlns:a="http://schemas.openxmlformats.org/drawingml/2006/main" prst="rect">
-            <a:avLst/>
-          </a:prstGeom>
-          <a:noFill xmlns:a="http://schemas.openxmlformats.org/drawingml/2006/main"/>
-          <a:ln xmlns:a="http://schemas.openxmlformats.org/drawingml/2006/main" w="0">
-            <a:noFill/>
-          </a:ln>
-        </p:spPr>
-        <p:txBody>
-          <a:bodyPr xmlns:a="http://schemas.openxmlformats.org/drawingml/2006/main" wrap="square" lIns="0" tIns="0" rIns="0" bIns="0" anchor="t"/>
-          <a:lstStyle xmlns:a="http://schemas.openxmlformats.org/drawingml/2006/main"/>
-          <a:p xmlns:a="http://schemas.openxmlformats.org/drawingml/2006/main">
-            <a:r>
-              <a:rPr lang="en-US" sz="2850" b="1">
+              <a:t>ONE IMAGE · ONE THESIS · ONE TURN</a:t>
+            </a:r>
+            <a:endParaRPr lang="en-US"/>
+          </a:p>
+        </p:txBody>
+      </p:sp>
+      <p:sp>
+        <p:nvSpPr>
+          <p:cNvPr id="8" name="section-next"/>
+          <p:cNvSpPr txBox="1"/>
+          <p:nvPr/>
+        </p:nvSpPr>
+        <p:spPr>
+          <a:xfrm xmlns:a="http://schemas.openxmlformats.org/drawingml/2006/main">
+            <a:off x="914400" y="5772150"/>
+            <a:ext cx="5334000" cy="476250"/>
+          </a:xfrm>
+          <a:prstGeom xmlns:a="http://schemas.openxmlformats.org/drawingml/2006/main" prst="rect">
+            <a:avLst/>
+          </a:prstGeom>
+          <a:noFill xmlns:a="http://schemas.openxmlformats.org/drawingml/2006/main"/>
+          <a:ln xmlns:a="http://schemas.openxmlformats.org/drawingml/2006/main" w="0">
+            <a:noFill/>
+          </a:ln>
+        </p:spPr>
+        <p:txBody>
+          <a:bodyPr xmlns:a="http://schemas.openxmlformats.org/drawingml/2006/main" wrap="square" lIns="0" tIns="0" rIns="0" bIns="0" anchor="t"/>
+          <a:lstStyle xmlns:a="http://schemas.openxmlformats.org/drawingml/2006/main"/>
+          <a:p xmlns:a="http://schemas.openxmlformats.org/drawingml/2006/main">
+            <a:r>
+              <a:rPr lang="en-US" sz="2100" b="1">
                 <a:solidFill>
                   <a:srgbClr val="17324B"/>
                 </a:solidFill>
                 <a:latin typeface="Arial"/>
                 <a:ea typeface="Arial"/>
               </a:rPr>
-              <a:t>Make the choice legible</a:t>
-            </a:r>
-            <a:endParaRPr lang="en-US"/>
-          </a:p>
-        </p:txBody>
-      </p:sp>
-      <p:sp>
-        <p:nvSpPr>
-          <p:cNvPr id="6" name="visual-body"/>
-          <p:cNvSpPr txBox="1"/>
-          <p:nvPr/>
-        </p:nvSpPr>
-        <p:spPr>
-          <a:xfrm xmlns:a="http://schemas.openxmlformats.org/drawingml/2006/main">
-            <a:off x="952500" y="1981200"/>
-            <a:ext cx="10477500" cy="266700"/>
-          </a:xfrm>
-          <a:prstGeom xmlns:a="http://schemas.openxmlformats.org/drawingml/2006/main" prst="rect">
-            <a:avLst/>
-          </a:prstGeom>
-          <a:noFill xmlns:a="http://schemas.openxmlformats.org/drawingml/2006/main"/>
-          <a:ln xmlns:a="http://schemas.openxmlformats.org/drawingml/2006/main" w="0">
-            <a:noFill/>
-          </a:ln>
-        </p:spPr>
-        <p:txBody>
-          <a:bodyPr xmlns:a="http://schemas.openxmlformats.org/drawingml/2006/main" wrap="square" lIns="0" tIns="0" rIns="0" bIns="0" anchor="t"/>
-          <a:lstStyle xmlns:a="http://schemas.openxmlformats.org/drawingml/2006/main"/>
-          <a:p xmlns:a="http://schemas.openxmlformats.org/drawingml/2006/main">
-            <a:r>
-              <a:rPr lang="en-US" sz="1350">
-                <a:solidFill>
-                  <a:srgbClr val="909DA9"/>
-                </a:solidFill>
-                <a:latin typeface="Arial"/>
-                <a:ea typeface="Arial"/>
-              </a:rPr>
-              <a:t>A single visual cue can make the recommendation easier to remember.</a:t>
-            </a:r>
-            <a:endParaRPr lang="en-US"/>
-          </a:p>
-        </p:txBody>
-      </p:sp>
-      <p:sp>
-        <p:nvSpPr>
-          <p:cNvPr id="7" name="visual-rule"/>
-          <p:cNvSpPr/>
-          <p:nvPr/>
-        </p:nvSpPr>
-        <p:spPr>
-          <a:xfrm xmlns:a="http://schemas.openxmlformats.org/drawingml/2006/main">
-            <a:off x="914400" y="2457450"/>
-            <a:ext cx="13411200" cy="0"/>
-          </a:xfrm>
-          <a:prstGeom xmlns:a="http://schemas.openxmlformats.org/drawingml/2006/main" prst="line">
-            <a:avLst/>
-          </a:prstGeom>
-          <a:noFill xmlns:a="http://schemas.openxmlformats.org/drawingml/2006/main"/>
-          <a:ln xmlns:a="http://schemas.openxmlformats.org/drawingml/2006/main" w="25400">
-            <a:solidFill>
-              <a:srgbClr val="909DA9"/>
-            </a:solidFill>
-            <a:prstDash val="solid"/>
-          </a:ln>
-        </p:spPr>
-        <p:txBody>
-          <a:bodyPr xmlns:a="http://schemas.openxmlformats.org/drawingml/2006/main" wrap="square" lIns="0" tIns="0" rIns="0" bIns="0" anchor="t"/>
-          <a:lstStyle xmlns:a="http://schemas.openxmlformats.org/drawingml/2006/main"/>
-          <a:p xmlns:a="http://schemas.openxmlformats.org/drawingml/2006/main">
-            <a:r>
-              <a:rPr lang="en-US"/>
-              <a:t/>
-            </a:r>
-            <a:endParaRPr lang="en-US"/>
-          </a:p>
-        </p:txBody>
-      </p:sp>
-      <p:sp>
-        <p:nvSpPr>
-          <p:cNvPr id="8" name="visual-process-rail"/>
-          <p:cNvSpPr/>
-          <p:nvPr/>
-        </p:nvSpPr>
-        <p:spPr>
-          <a:xfrm xmlns:a="http://schemas.openxmlformats.org/drawingml/2006/main">
-            <a:off x="1447800" y="3524250"/>
-            <a:ext cx="0" cy="2647950"/>
-          </a:xfrm>
-          <a:prstGeom xmlns:a="http://schemas.openxmlformats.org/drawingml/2006/main" prst="line">
-            <a:avLst/>
-          </a:prstGeom>
-          <a:noFill xmlns:a="http://schemas.openxmlformats.org/drawingml/2006/main"/>
-          <a:ln xmlns:a="http://schemas.openxmlformats.org/drawingml/2006/main" w="25400">
-            <a:solidFill>
-              <a:srgbClr val="909DA9"/>
-            </a:solidFill>
-            <a:prstDash val="solid"/>
-          </a:ln>
-        </p:spPr>
-        <p:txBody>
-          <a:bodyPr xmlns:a="http://schemas.openxmlformats.org/drawingml/2006/main" wrap="square" lIns="0" tIns="0" rIns="0" bIns="0" anchor="t"/>
-          <a:lstStyle xmlns:a="http://schemas.openxmlformats.org/drawingml/2006/main"/>
-          <a:p xmlns:a="http://schemas.openxmlformats.org/drawingml/2006/main">
-            <a:r>
-              <a:rPr lang="en-US"/>
-              <a:t/>
-            </a:r>
-            <a:endParaRPr lang="en-US"/>
-          </a:p>
-        </p:txBody>
-      </p:sp>
-      <p:sp>
-        <p:nvSpPr>
-          <p:cNvPr id="9" name="visual-process-node-0"/>
-          <p:cNvSpPr/>
-          <p:nvPr/>
-        </p:nvSpPr>
-        <p:spPr>
-          <a:xfrm xmlns:a="http://schemas.openxmlformats.org/drawingml/2006/main">
-            <a:off x="1257300" y="3352800"/>
-            <a:ext cx="400050" cy="400050"/>
-          </a:xfrm>
-          <a:prstGeom xmlns:a="http://schemas.openxmlformats.org/drawingml/2006/main" prst="ellipse">
-            <a:avLst/>
-          </a:prstGeom>
-          <a:solidFill xmlns:a="http://schemas.openxmlformats.org/drawingml/2006/main">
-            <a:srgbClr val="FFFFFF"/>
-          </a:solidFill>
-          <a:ln xmlns:a="http://schemas.openxmlformats.org/drawingml/2006/main" w="38100">
-            <a:solidFill>
-              <a:srgbClr val="17324B"/>
-            </a:solidFill>
-            <a:prstDash val="solid"/>
-          </a:ln>
-        </p:spPr>
-        <p:txBody>
-          <a:bodyPr xmlns:a="http://schemas.openxmlformats.org/drawingml/2006/main" wrap="square" lIns="0" tIns="0" rIns="0" bIns="0" anchor="t"/>
-          <a:lstStyle xmlns:a="http://schemas.openxmlformats.org/drawingml/2006/main"/>
-          <a:p xmlns:a="http://schemas.openxmlformats.org/drawingml/2006/main">
-            <a:r>
-              <a:rPr lang="en-US"/>
-              <a:t/>
-            </a:r>
-            <a:endParaRPr lang="en-US"/>
-          </a:p>
-        </p:txBody>
-      </p:sp>
-      <p:sp>
-        <p:nvSpPr>
-          <p:cNvPr id="10" name="visual-process-number-0"/>
-          <p:cNvSpPr txBox="1"/>
-          <p:nvPr/>
-        </p:nvSpPr>
-        <p:spPr>
-          <a:xfrm xmlns:a="http://schemas.openxmlformats.org/drawingml/2006/main">
-            <a:off x="1238250" y="3467100"/>
-            <a:ext cx="438150" cy="152400"/>
-          </a:xfrm>
-          <a:prstGeom xmlns:a="http://schemas.openxmlformats.org/drawingml/2006/main" prst="rect">
-            <a:avLst/>
-          </a:prstGeom>
-          <a:noFill xmlns:a="http://schemas.openxmlformats.org/drawingml/2006/main"/>
-          <a:ln xmlns:a="http://schemas.openxmlformats.org/drawingml/2006/main" w="0">
-            <a:noFill/>
-          </a:ln>
-        </p:spPr>
-        <p:txBody>
-          <a:bodyPr xmlns:a="http://schemas.openxmlformats.org/drawingml/2006/main" wrap="square" lIns="0" tIns="0" rIns="0" bIns="0" anchor="t"/>
-          <a:lstStyle xmlns:a="http://schemas.openxmlformats.org/drawingml/2006/main"/>
-          <a:p xmlns:a="http://schemas.openxmlformats.org/drawingml/2006/main">
-            <a:pPr algn="ctr"/>
-            <a:r>
-              <a:rPr lang="en-US" sz="900" b="1">
-                <a:solidFill>
-                  <a:srgbClr val="0C9ED0"/>
-                </a:solidFill>
-                <a:latin typeface="Arial"/>
-                <a:ea typeface="Arial"/>
-              </a:rPr>
-              <a:t>01</a:t>
-            </a:r>
-            <a:endParaRPr lang="en-US"/>
-          </a:p>
-        </p:txBody>
-      </p:sp>
-      <p:sp>
-        <p:nvSpPr>
-          <p:cNvPr id="11" name="visual-process-label-0"/>
-          <p:cNvSpPr txBox="1"/>
-          <p:nvPr/>
-        </p:nvSpPr>
-        <p:spPr>
-          <a:xfrm xmlns:a="http://schemas.openxmlformats.org/drawingml/2006/main">
-            <a:off x="1943100" y="3371850"/>
-            <a:ext cx="1714500" cy="228600"/>
-          </a:xfrm>
-          <a:prstGeom xmlns:a="http://schemas.openxmlformats.org/drawingml/2006/main" prst="rect">
-            <a:avLst/>
-          </a:prstGeom>
-          <a:noFill xmlns:a="http://schemas.openxmlformats.org/drawingml/2006/main"/>
-          <a:ln xmlns:a="http://schemas.openxmlformats.org/drawingml/2006/main" w="0">
-            <a:noFill/>
-          </a:ln>
-        </p:spPr>
-        <p:txBody>
-          <a:bodyPr xmlns:a="http://schemas.openxmlformats.org/drawingml/2006/main" wrap="square" lIns="0" tIns="0" rIns="0" bIns="0" anchor="t"/>
-          <a:lstStyle xmlns:a="http://schemas.openxmlformats.org/drawingml/2006/main"/>
-          <a:p xmlns:a="http://schemas.openxmlformats.org/drawingml/2006/main">
-            <a:r>
-              <a:rPr lang="en-US" sz="1650" b="1">
-                <a:solidFill>
-                  <a:srgbClr val="17324B"/>
-                </a:solidFill>
-                <a:latin typeface="Arial"/>
-                <a:ea typeface="Arial"/>
-              </a:rPr>
-              <a:t>Observe</a:t>
-            </a:r>
-            <a:endParaRPr lang="en-US"/>
-          </a:p>
-        </p:txBody>
-      </p:sp>
-      <p:sp>
-        <p:nvSpPr>
-          <p:cNvPr id="12" name="visual-process-text-0"/>
-          <p:cNvSpPr txBox="1"/>
-          <p:nvPr/>
-        </p:nvSpPr>
-        <p:spPr>
-          <a:xfrm xmlns:a="http://schemas.openxmlformats.org/drawingml/2006/main">
-            <a:off x="3829050" y="3400425"/>
-            <a:ext cx="2476500" cy="228600"/>
-          </a:xfrm>
-          <a:prstGeom xmlns:a="http://schemas.openxmlformats.org/drawingml/2006/main" prst="rect">
-            <a:avLst/>
-          </a:prstGeom>
-          <a:noFill xmlns:a="http://schemas.openxmlformats.org/drawingml/2006/main"/>
-          <a:ln xmlns:a="http://schemas.openxmlformats.org/drawingml/2006/main" w="0">
-            <a:noFill/>
-          </a:ln>
-        </p:spPr>
-        <p:txBody>
-          <a:bodyPr xmlns:a="http://schemas.openxmlformats.org/drawingml/2006/main" wrap="square" lIns="0" tIns="0" rIns="0" bIns="0" anchor="t"/>
-          <a:lstStyle xmlns:a="http://schemas.openxmlformats.org/drawingml/2006/main"/>
-          <a:p xmlns:a="http://schemas.openxmlformats.org/drawingml/2006/main">
-            <a:r>
-              <a:rPr lang="en-US" sz="1275">
-                <a:solidFill>
-                  <a:srgbClr val="909DA9"/>
-                </a:solidFill>
-                <a:latin typeface="Arial"/>
-                <a:ea typeface="Arial"/>
-              </a:rPr>
-              <a:t>Find the signal</a:t>
-            </a:r>
-            <a:endParaRPr lang="en-US"/>
-          </a:p>
-        </p:txBody>
-      </p:sp>
-      <p:sp>
-        <p:nvSpPr>
-          <p:cNvPr id="13" name="visual-process-node-1"/>
-          <p:cNvSpPr/>
-          <p:nvPr/>
-        </p:nvSpPr>
-        <p:spPr>
-          <a:xfrm xmlns:a="http://schemas.openxmlformats.org/drawingml/2006/main">
-            <a:off x="1257300" y="4095750"/>
-            <a:ext cx="400050" cy="400050"/>
-          </a:xfrm>
-          <a:prstGeom xmlns:a="http://schemas.openxmlformats.org/drawingml/2006/main" prst="ellipse">
-            <a:avLst/>
-          </a:prstGeom>
-          <a:solidFill xmlns:a="http://schemas.openxmlformats.org/drawingml/2006/main">
-            <a:srgbClr val="FFFFFF"/>
-          </a:solidFill>
-          <a:ln xmlns:a="http://schemas.openxmlformats.org/drawingml/2006/main" w="38100">
-            <a:solidFill>
-              <a:srgbClr val="17324B"/>
-            </a:solidFill>
-            <a:prstDash val="solid"/>
-          </a:ln>
-        </p:spPr>
-        <p:txBody>
-          <a:bodyPr xmlns:a="http://schemas.openxmlformats.org/drawingml/2006/main" wrap="square" lIns="0" tIns="0" rIns="0" bIns="0" anchor="t"/>
-          <a:lstStyle xmlns:a="http://schemas.openxmlformats.org/drawingml/2006/main"/>
-          <a:p xmlns:a="http://schemas.openxmlformats.org/drawingml/2006/main">
-            <a:r>
-              <a:rPr lang="en-US"/>
-              <a:t/>
-            </a:r>
-            <a:endParaRPr lang="en-US"/>
-          </a:p>
-        </p:txBody>
-      </p:sp>
-      <p:sp>
-        <p:nvSpPr>
-          <p:cNvPr id="14" name="visual-process-number-1"/>
-          <p:cNvSpPr txBox="1"/>
-          <p:nvPr/>
-        </p:nvSpPr>
-        <p:spPr>
-          <a:xfrm xmlns:a="http://schemas.openxmlformats.org/drawingml/2006/main">
-            <a:off x="1238250" y="4210050"/>
-            <a:ext cx="438150" cy="152400"/>
-          </a:xfrm>
-          <a:prstGeom xmlns:a="http://schemas.openxmlformats.org/drawingml/2006/main" prst="rect">
-            <a:avLst/>
-          </a:prstGeom>
-          <a:noFill xmlns:a="http://schemas.openxmlformats.org/drawingml/2006/main"/>
-          <a:ln xmlns:a="http://schemas.openxmlformats.org/drawingml/2006/main" w="0">
-            <a:noFill/>
-          </a:ln>
-        </p:spPr>
-        <p:txBody>
-          <a:bodyPr xmlns:a="http://schemas.openxmlformats.org/drawingml/2006/main" wrap="square" lIns="0" tIns="0" rIns="0" bIns="0" anchor="t"/>
-          <a:lstStyle xmlns:a="http://schemas.openxmlformats.org/drawingml/2006/main"/>
-          <a:p xmlns:a="http://schemas.openxmlformats.org/drawingml/2006/main">
-            <a:pPr algn="ctr"/>
-            <a:r>
-              <a:rPr lang="en-US" sz="900" b="1">
-                <a:solidFill>
-                  <a:srgbClr val="0C9ED0"/>
-                </a:solidFill>
-                <a:latin typeface="Arial"/>
-                <a:ea typeface="Arial"/>
-              </a:rPr>
-              <a:t>02</a:t>
-            </a:r>
-            <a:endParaRPr lang="en-US"/>
-          </a:p>
-        </p:txBody>
-      </p:sp>
-      <p:sp>
-        <p:nvSpPr>
-          <p:cNvPr id="15" name="visual-process-label-1"/>
-          <p:cNvSpPr txBox="1"/>
-          <p:nvPr/>
-        </p:nvSpPr>
-        <p:spPr>
-          <a:xfrm xmlns:a="http://schemas.openxmlformats.org/drawingml/2006/main">
-            <a:off x="1943100" y="4114800"/>
-            <a:ext cx="1714500" cy="228600"/>
-          </a:xfrm>
-          <a:prstGeom xmlns:a="http://schemas.openxmlformats.org/drawingml/2006/main" prst="rect">
-            <a:avLst/>
-          </a:prstGeom>
-          <a:noFill xmlns:a="http://schemas.openxmlformats.org/drawingml/2006/main"/>
-          <a:ln xmlns:a="http://schemas.openxmlformats.org/drawingml/2006/main" w="0">
-            <a:noFill/>
-          </a:ln>
-        </p:spPr>
-        <p:txBody>
-          <a:bodyPr xmlns:a="http://schemas.openxmlformats.org/drawingml/2006/main" wrap="square" lIns="0" tIns="0" rIns="0" bIns="0" anchor="t"/>
-          <a:lstStyle xmlns:a="http://schemas.openxmlformats.org/drawingml/2006/main"/>
-          <a:p xmlns:a="http://schemas.openxmlformats.org/drawingml/2006/main">
-            <a:r>
-              <a:rPr lang="en-US" sz="1650" b="1">
-                <a:solidFill>
-                  <a:srgbClr val="17324B"/>
-                </a:solidFill>
-                <a:latin typeface="Arial"/>
-                <a:ea typeface="Arial"/>
-              </a:rPr>
-              <a:t>Explain</a:t>
-            </a:r>
-            <a:endParaRPr lang="en-US"/>
-          </a:p>
-        </p:txBody>
-      </p:sp>
-      <p:sp>
-        <p:nvSpPr>
-          <p:cNvPr id="16" name="visual-process-text-1"/>
-          <p:cNvSpPr txBox="1"/>
-          <p:nvPr/>
-        </p:nvSpPr>
-        <p:spPr>
-          <a:xfrm xmlns:a="http://schemas.openxmlformats.org/drawingml/2006/main">
-            <a:off x="3829050" y="4143375"/>
-            <a:ext cx="2476500" cy="228600"/>
-          </a:xfrm>
-          <a:prstGeom xmlns:a="http://schemas.openxmlformats.org/drawingml/2006/main" prst="rect">
-            <a:avLst/>
-          </a:prstGeom>
-          <a:noFill xmlns:a="http://schemas.openxmlformats.org/drawingml/2006/main"/>
-          <a:ln xmlns:a="http://schemas.openxmlformats.org/drawingml/2006/main" w="0">
-            <a:noFill/>
-          </a:ln>
-        </p:spPr>
-        <p:txBody>
-          <a:bodyPr xmlns:a="http://schemas.openxmlformats.org/drawingml/2006/main" wrap="square" lIns="0" tIns="0" rIns="0" bIns="0" anchor="t"/>
-          <a:lstStyle xmlns:a="http://schemas.openxmlformats.org/drawingml/2006/main"/>
-          <a:p xmlns:a="http://schemas.openxmlformats.org/drawingml/2006/main">
-            <a:r>
-              <a:rPr lang="en-US" sz="1275">
-                <a:solidFill>
-                  <a:srgbClr val="909DA9"/>
-                </a:solidFill>
-                <a:latin typeface="Arial"/>
-                <a:ea typeface="Arial"/>
-              </a:rPr>
-              <a:t>Name the mechanism</a:t>
-            </a:r>
-            <a:endParaRPr lang="en-US"/>
-          </a:p>
-        </p:txBody>
-      </p:sp>
-      <p:sp>
-        <p:nvSpPr>
-          <p:cNvPr id="17" name="visual-process-node-2"/>
-          <p:cNvSpPr/>
-          <p:nvPr/>
-        </p:nvSpPr>
-        <p:spPr>
-          <a:xfrm xmlns:a="http://schemas.openxmlformats.org/drawingml/2006/main">
-            <a:off x="1257300" y="4838700"/>
-            <a:ext cx="400050" cy="400050"/>
-          </a:xfrm>
-          <a:prstGeom xmlns:a="http://schemas.openxmlformats.org/drawingml/2006/main" prst="ellipse">
-            <a:avLst/>
-          </a:prstGeom>
-          <a:solidFill xmlns:a="http://schemas.openxmlformats.org/drawingml/2006/main">
-            <a:srgbClr val="FFFFFF"/>
-          </a:solidFill>
-          <a:ln xmlns:a="http://schemas.openxmlformats.org/drawingml/2006/main" w="38100">
-            <a:solidFill>
-              <a:srgbClr val="17324B"/>
-            </a:solidFill>
-            <a:prstDash val="solid"/>
-          </a:ln>
-        </p:spPr>
-        <p:txBody>
-          <a:bodyPr xmlns:a="http://schemas.openxmlformats.org/drawingml/2006/main" wrap="square" lIns="0" tIns="0" rIns="0" bIns="0" anchor="t"/>
-          <a:lstStyle xmlns:a="http://schemas.openxmlformats.org/drawingml/2006/main"/>
-          <a:p xmlns:a="http://schemas.openxmlformats.org/drawingml/2006/main">
-            <a:r>
-              <a:rPr lang="en-US"/>
-              <a:t/>
-            </a:r>
-            <a:endParaRPr lang="en-US"/>
-          </a:p>
-        </p:txBody>
-      </p:sp>
-      <p:sp>
-        <p:nvSpPr>
-          <p:cNvPr id="18" name="visual-process-number-2"/>
-          <p:cNvSpPr txBox="1"/>
-          <p:nvPr/>
-        </p:nvSpPr>
-        <p:spPr>
-          <a:xfrm xmlns:a="http://schemas.openxmlformats.org/drawingml/2006/main">
-            <a:off x="1238250" y="4953000"/>
-            <a:ext cx="438150" cy="152400"/>
-          </a:xfrm>
-          <a:prstGeom xmlns:a="http://schemas.openxmlformats.org/drawingml/2006/main" prst="rect">
-            <a:avLst/>
-          </a:prstGeom>
-          <a:noFill xmlns:a="http://schemas.openxmlformats.org/drawingml/2006/main"/>
-          <a:ln xmlns:a="http://schemas.openxmlformats.org/drawingml/2006/main" w="0">
-            <a:noFill/>
-          </a:ln>
-        </p:spPr>
-        <p:txBody>
-          <a:bodyPr xmlns:a="http://schemas.openxmlformats.org/drawingml/2006/main" wrap="square" lIns="0" tIns="0" rIns="0" bIns="0" anchor="t"/>
-          <a:lstStyle xmlns:a="http://schemas.openxmlformats.org/drawingml/2006/main"/>
-          <a:p xmlns:a="http://schemas.openxmlformats.org/drawingml/2006/main">
-            <a:pPr algn="ctr"/>
-            <a:r>
-              <a:rPr lang="en-US" sz="900" b="1">
-                <a:solidFill>
-                  <a:srgbClr val="0C9ED0"/>
-                </a:solidFill>
-                <a:latin typeface="Arial"/>
-                <a:ea typeface="Arial"/>
-              </a:rPr>
-              <a:t>03</a:t>
-            </a:r>
-            <a:endParaRPr lang="en-US"/>
-          </a:p>
-        </p:txBody>
-      </p:sp>
-      <p:sp>
-        <p:nvSpPr>
-          <p:cNvPr id="19" name="visual-process-label-2"/>
-          <p:cNvSpPr txBox="1"/>
-          <p:nvPr/>
-        </p:nvSpPr>
-        <p:spPr>
-          <a:xfrm xmlns:a="http://schemas.openxmlformats.org/drawingml/2006/main">
-            <a:off x="1943100" y="4857750"/>
-            <a:ext cx="1714500" cy="228600"/>
-          </a:xfrm>
-          <a:prstGeom xmlns:a="http://schemas.openxmlformats.org/drawingml/2006/main" prst="rect">
-            <a:avLst/>
-          </a:prstGeom>
-          <a:noFill xmlns:a="http://schemas.openxmlformats.org/drawingml/2006/main"/>
-          <a:ln xmlns:a="http://schemas.openxmlformats.org/drawingml/2006/main" w="0">
-            <a:noFill/>
-          </a:ln>
-        </p:spPr>
-        <p:txBody>
-          <a:bodyPr xmlns:a="http://schemas.openxmlformats.org/drawingml/2006/main" wrap="square" lIns="0" tIns="0" rIns="0" bIns="0" anchor="t"/>
-          <a:lstStyle xmlns:a="http://schemas.openxmlformats.org/drawingml/2006/main"/>
-          <a:p xmlns:a="http://schemas.openxmlformats.org/drawingml/2006/main">
-            <a:r>
-              <a:rPr lang="en-US" sz="1650" b="1">
-                <a:solidFill>
-                  <a:srgbClr val="17324B"/>
-                </a:solidFill>
-                <a:latin typeface="Arial"/>
-                <a:ea typeface="Arial"/>
-              </a:rPr>
-              <a:t>Choose</a:t>
-            </a:r>
-            <a:endParaRPr lang="en-US"/>
-          </a:p>
-        </p:txBody>
-      </p:sp>
-      <p:sp>
-        <p:nvSpPr>
-          <p:cNvPr id="20" name="visual-process-text-2"/>
-          <p:cNvSpPr txBox="1"/>
-          <p:nvPr/>
-        </p:nvSpPr>
-        <p:spPr>
-          <a:xfrm xmlns:a="http://schemas.openxmlformats.org/drawingml/2006/main">
-            <a:off x="3829050" y="4886325"/>
-            <a:ext cx="2476500" cy="228600"/>
-          </a:xfrm>
-          <a:prstGeom xmlns:a="http://schemas.openxmlformats.org/drawingml/2006/main" prst="rect">
-            <a:avLst/>
-          </a:prstGeom>
-          <a:noFill xmlns:a="http://schemas.openxmlformats.org/drawingml/2006/main"/>
-          <a:ln xmlns:a="http://schemas.openxmlformats.org/drawingml/2006/main" w="0">
-            <a:noFill/>
-          </a:ln>
-        </p:spPr>
-        <p:txBody>
-          <a:bodyPr xmlns:a="http://schemas.openxmlformats.org/drawingml/2006/main" wrap="square" lIns="0" tIns="0" rIns="0" bIns="0" anchor="t"/>
-          <a:lstStyle xmlns:a="http://schemas.openxmlformats.org/drawingml/2006/main"/>
-          <a:p xmlns:a="http://schemas.openxmlformats.org/drawingml/2006/main">
-            <a:r>
-              <a:rPr lang="en-US" sz="1275">
-                <a:solidFill>
-                  <a:srgbClr val="909DA9"/>
-                </a:solidFill>
-                <a:latin typeface="Arial"/>
-                <a:ea typeface="Arial"/>
-              </a:rPr>
-              <a:t>Set the condition</a:t>
-            </a:r>
-            <a:endParaRPr lang="en-US"/>
-          </a:p>
-        </p:txBody>
-      </p:sp>
-      <p:sp>
-        <p:nvSpPr>
-          <p:cNvPr id="21" name="visual-process-node-3"/>
-          <p:cNvSpPr/>
-          <p:nvPr/>
-        </p:nvSpPr>
-        <p:spPr>
-          <a:xfrm xmlns:a="http://schemas.openxmlformats.org/drawingml/2006/main">
-            <a:off x="1257300" y="5581650"/>
-            <a:ext cx="400050" cy="400050"/>
-          </a:xfrm>
-          <a:prstGeom xmlns:a="http://schemas.openxmlformats.org/drawingml/2006/main" prst="ellipse">
-            <a:avLst/>
-          </a:prstGeom>
-          <a:solidFill xmlns:a="http://schemas.openxmlformats.org/drawingml/2006/main">
-            <a:srgbClr val="0C9ED0"/>
-          </a:solidFill>
-          <a:ln xmlns:a="http://schemas.openxmlformats.org/drawingml/2006/main" w="38100">
-            <a:solidFill>
-              <a:srgbClr val="0C9ED0"/>
-            </a:solidFill>
-            <a:prstDash val="solid"/>
-          </a:ln>
-        </p:spPr>
-        <p:txBody>
-          <a:bodyPr xmlns:a="http://schemas.openxmlformats.org/drawingml/2006/main" wrap="square" lIns="0" tIns="0" rIns="0" bIns="0" anchor="t"/>
-          <a:lstStyle xmlns:a="http://schemas.openxmlformats.org/drawingml/2006/main"/>
-          <a:p xmlns:a="http://schemas.openxmlformats.org/drawingml/2006/main">
-            <a:r>
-              <a:rPr lang="en-US"/>
-              <a:t/>
-            </a:r>
-            <a:endParaRPr lang="en-US"/>
-          </a:p>
-        </p:txBody>
-      </p:sp>
-      <p:sp>
-        <p:nvSpPr>
-          <p:cNvPr id="22" name="visual-process-number-3"/>
-          <p:cNvSpPr txBox="1"/>
-          <p:nvPr/>
-        </p:nvSpPr>
-        <p:spPr>
-          <a:xfrm xmlns:a="http://schemas.openxmlformats.org/drawingml/2006/main">
-            <a:off x="1238250" y="5695950"/>
-            <a:ext cx="438150" cy="152400"/>
-          </a:xfrm>
-          <a:prstGeom xmlns:a="http://schemas.openxmlformats.org/drawingml/2006/main" prst="rect">
-            <a:avLst/>
-          </a:prstGeom>
-          <a:noFill xmlns:a="http://schemas.openxmlformats.org/drawingml/2006/main"/>
-          <a:ln xmlns:a="http://schemas.openxmlformats.org/drawingml/2006/main" w="0">
-            <a:noFill/>
-          </a:ln>
-        </p:spPr>
-        <p:txBody>
-          <a:bodyPr xmlns:a="http://schemas.openxmlformats.org/drawingml/2006/main" wrap="square" lIns="0" tIns="0" rIns="0" bIns="0" anchor="t"/>
-          <a:lstStyle xmlns:a="http://schemas.openxmlformats.org/drawingml/2006/main"/>
-          <a:p xmlns:a="http://schemas.openxmlformats.org/drawingml/2006/main">
-            <a:pPr algn="ctr"/>
-            <a:r>
-              <a:rPr lang="en-US" sz="900" b="1">
-                <a:solidFill>
-                  <a:srgbClr val="FFFFFF"/>
-                </a:solidFill>
-                <a:latin typeface="Arial"/>
-                <a:ea typeface="Arial"/>
-              </a:rPr>
-              <a:t>04</a:t>
-            </a:r>
-            <a:endParaRPr lang="en-US"/>
-          </a:p>
-        </p:txBody>
-      </p:sp>
-      <p:sp>
-        <p:nvSpPr>
-          <p:cNvPr id="23" name="visual-process-label-3"/>
-          <p:cNvSpPr txBox="1"/>
-          <p:nvPr/>
-        </p:nvSpPr>
-        <p:spPr>
-          <a:xfrm xmlns:a="http://schemas.openxmlformats.org/drawingml/2006/main">
-            <a:off x="1943100" y="5600700"/>
-            <a:ext cx="1714500" cy="228600"/>
-          </a:xfrm>
-          <a:prstGeom xmlns:a="http://schemas.openxmlformats.org/drawingml/2006/main" prst="rect">
-            <a:avLst/>
-          </a:prstGeom>
-          <a:noFill xmlns:a="http://schemas.openxmlformats.org/drawingml/2006/main"/>
-          <a:ln xmlns:a="http://schemas.openxmlformats.org/drawingml/2006/main" w="0">
-            <a:noFill/>
-          </a:ln>
-        </p:spPr>
-        <p:txBody>
-          <a:bodyPr xmlns:a="http://schemas.openxmlformats.org/drawingml/2006/main" wrap="square" lIns="0" tIns="0" rIns="0" bIns="0" anchor="t"/>
-          <a:lstStyle xmlns:a="http://schemas.openxmlformats.org/drawingml/2006/main"/>
-          <a:p xmlns:a="http://schemas.openxmlformats.org/drawingml/2006/main">
-            <a:r>
-              <a:rPr lang="en-US" sz="1650" b="1">
-                <a:solidFill>
-                  <a:srgbClr val="17324B"/>
-                </a:solidFill>
-                <a:latin typeface="Arial"/>
-                <a:ea typeface="Arial"/>
-              </a:rPr>
-              <a:t>Act</a:t>
-            </a:r>
-            <a:endParaRPr lang="en-US"/>
-          </a:p>
-        </p:txBody>
-      </p:sp>
-      <p:sp>
-        <p:nvSpPr>
-          <p:cNvPr id="24" name="visual-process-text-3"/>
-          <p:cNvSpPr txBox="1"/>
-          <p:nvPr/>
-        </p:nvSpPr>
-        <p:spPr>
-          <a:xfrm xmlns:a="http://schemas.openxmlformats.org/drawingml/2006/main">
-            <a:off x="3829050" y="5629275"/>
-            <a:ext cx="2476500" cy="228600"/>
-          </a:xfrm>
-          <a:prstGeom xmlns:a="http://schemas.openxmlformats.org/drawingml/2006/main" prst="rect">
-            <a:avLst/>
-          </a:prstGeom>
-          <a:noFill xmlns:a="http://schemas.openxmlformats.org/drawingml/2006/main"/>
-          <a:ln xmlns:a="http://schemas.openxmlformats.org/drawingml/2006/main" w="0">
-            <a:noFill/>
-          </a:ln>
-        </p:spPr>
-        <p:txBody>
-          <a:bodyPr xmlns:a="http://schemas.openxmlformats.org/drawingml/2006/main" wrap="square" lIns="0" tIns="0" rIns="0" bIns="0" anchor="t"/>
-          <a:lstStyle xmlns:a="http://schemas.openxmlformats.org/drawingml/2006/main"/>
-          <a:p xmlns:a="http://schemas.openxmlformats.org/drawingml/2006/main">
-            <a:r>
-              <a:rPr lang="en-US" sz="1275">
-                <a:solidFill>
-                  <a:srgbClr val="909DA9"/>
-                </a:solidFill>
-                <a:latin typeface="Arial"/>
-                <a:ea typeface="Arial"/>
-              </a:rPr>
-              <a:t>Return with proof</a:t>
-            </a:r>
-            <a:endParaRPr lang="en-US"/>
-          </a:p>
-        </p:txBody>
-      </p:sp>
-      <p:sp>
-        <p:nvSpPr>
-          <p:cNvPr id="25" name="visual-process-rule"/>
-          <p:cNvSpPr/>
-          <p:nvPr/>
-        </p:nvSpPr>
-        <p:spPr>
-          <a:xfrm xmlns:a="http://schemas.openxmlformats.org/drawingml/2006/main">
-            <a:off x="7239000" y="3486150"/>
-            <a:ext cx="0" cy="2705100"/>
-          </a:xfrm>
-          <a:prstGeom xmlns:a="http://schemas.openxmlformats.org/drawingml/2006/main" prst="line">
-            <a:avLst/>
-          </a:prstGeom>
-          <a:noFill xmlns:a="http://schemas.openxmlformats.org/drawingml/2006/main"/>
-          <a:ln xmlns:a="http://schemas.openxmlformats.org/drawingml/2006/main" w="12700">
-            <a:solidFill>
-              <a:srgbClr val="909DA9"/>
-            </a:solidFill>
-            <a:prstDash val="solid"/>
-          </a:ln>
-        </p:spPr>
-        <p:txBody>
-          <a:bodyPr xmlns:a="http://schemas.openxmlformats.org/drawingml/2006/main" wrap="square" lIns="0" tIns="0" rIns="0" bIns="0" anchor="t"/>
-          <a:lstStyle xmlns:a="http://schemas.openxmlformats.org/drawingml/2006/main"/>
-          <a:p xmlns:a="http://schemas.openxmlformats.org/drawingml/2006/main">
-            <a:r>
-              <a:rPr lang="en-US"/>
-              <a:t/>
-            </a:r>
-            <a:endParaRPr lang="en-US"/>
-          </a:p>
-        </p:txBody>
-      </p:sp>
-      <p:sp>
-        <p:nvSpPr>
-          <p:cNvPr id="26" name="visual-process-note-label"/>
-          <p:cNvSpPr txBox="1"/>
-          <p:nvPr/>
-        </p:nvSpPr>
-        <p:spPr>
-          <a:xfrm xmlns:a="http://schemas.openxmlformats.org/drawingml/2006/main">
-            <a:off x="8001000" y="3562350"/>
-            <a:ext cx="3429000" cy="228600"/>
-          </a:xfrm>
-          <a:prstGeom xmlns:a="http://schemas.openxmlformats.org/drawingml/2006/main" prst="rect">
-            <a:avLst/>
-          </a:prstGeom>
-          <a:noFill xmlns:a="http://schemas.openxmlformats.org/drawingml/2006/main"/>
-          <a:ln xmlns:a="http://schemas.openxmlformats.org/drawingml/2006/main" w="0">
-            <a:noFill/>
-          </a:ln>
-        </p:spPr>
-        <p:txBody>
-          <a:bodyPr xmlns:a="http://schemas.openxmlformats.org/drawingml/2006/main" wrap="square" lIns="0" tIns="0" rIns="0" bIns="0" anchor="t"/>
-          <a:lstStyle xmlns:a="http://schemas.openxmlformats.org/drawingml/2006/main"/>
-          <a:p xmlns:a="http://schemas.openxmlformats.org/drawingml/2006/main">
-            <a:r>
-              <a:rPr lang="en-US" sz="1125" b="1">
-                <a:solidFill>
-                  <a:srgbClr val="0C9ED0"/>
-                </a:solidFill>
-                <a:latin typeface="Arial"/>
-                <a:ea typeface="Arial"/>
-              </a:rPr>
-              <a:t>PROCESS CARRIER</a:t>
-            </a:r>
-            <a:endParaRPr lang="en-US"/>
-          </a:p>
-        </p:txBody>
-      </p:sp>
-      <p:sp>
-        <p:nvSpPr>
-          <p:cNvPr id="27" name="visual-process-note-title"/>
-          <p:cNvSpPr txBox="1"/>
-          <p:nvPr/>
-        </p:nvSpPr>
-        <p:spPr>
-          <a:xfrm xmlns:a="http://schemas.openxmlformats.org/drawingml/2006/main">
-            <a:off x="8001000" y="4038600"/>
-            <a:ext cx="4381500" cy="685800"/>
-          </a:xfrm>
-          <a:prstGeom xmlns:a="http://schemas.openxmlformats.org/drawingml/2006/main" prst="rect">
-            <a:avLst/>
-          </a:prstGeom>
-          <a:noFill xmlns:a="http://schemas.openxmlformats.org/drawingml/2006/main"/>
-          <a:ln xmlns:a="http://schemas.openxmlformats.org/drawingml/2006/main" w="0">
-            <a:noFill/>
-          </a:ln>
-        </p:spPr>
-        <p:txBody>
-          <a:bodyPr xmlns:a="http://schemas.openxmlformats.org/drawingml/2006/main" wrap="square" lIns="0" tIns="0" rIns="0" bIns="0" anchor="t"/>
-          <a:lstStyle xmlns:a="http://schemas.openxmlformats.org/drawingml/2006/main"/>
-          <a:p xmlns:a="http://schemas.openxmlformats.org/drawingml/2006/main">
-            <a:r>
-              <a:rPr lang="en-US" sz="2250" b="1">
-                <a:solidFill>
-                  <a:srgbClr val="17324B"/>
-                </a:solidFill>
-                <a:latin typeface="Arial"/>
-                <a:ea typeface="Arial"/>
-              </a:rPr>
-              <a:t>A relationship earns a line.</a:t>
-            </a:r>
-            <a:endParaRPr lang="en-US"/>
-          </a:p>
-        </p:txBody>
-      </p:sp>
-      <p:sp>
-        <p:nvSpPr>
-          <p:cNvPr id="28" name="visual-process-note-body"/>
-          <p:cNvSpPr txBox="1"/>
-          <p:nvPr/>
-        </p:nvSpPr>
-        <p:spPr>
-          <a:xfrm xmlns:a="http://schemas.openxmlformats.org/drawingml/2006/main">
-            <a:off x="8001000" y="5048250"/>
-            <a:ext cx="4572000" cy="685800"/>
-          </a:xfrm>
-          <a:prstGeom xmlns:a="http://schemas.openxmlformats.org/drawingml/2006/main" prst="rect">
-            <a:avLst/>
-          </a:prstGeom>
-          <a:noFill xmlns:a="http://schemas.openxmlformats.org/drawingml/2006/main"/>
-          <a:ln xmlns:a="http://schemas.openxmlformats.org/drawingml/2006/main" w="0">
-            <a:noFill/>
-          </a:ln>
-        </p:spPr>
-        <p:txBody>
-          <a:bodyPr xmlns:a="http://schemas.openxmlformats.org/drawingml/2006/main" wrap="square" lIns="0" tIns="0" rIns="0" bIns="0" anchor="t"/>
-          <a:lstStyle xmlns:a="http://schemas.openxmlformats.org/drawingml/2006/main"/>
-          <a:p xmlns:a="http://schemas.openxmlformats.org/drawingml/2006/main">
-            <a:r>
-              <a:rPr lang="en-US" sz="1275">
-                <a:solidFill>
-                  <a:srgbClr val="909DA9"/>
-                </a:solidFill>
-                <a:latin typeface="Arial"/>
-                <a:ea typeface="Arial"/>
-              </a:rPr>
-              <a:t>Use sequence, direction and conditions to make the mechanism visible. If the relationship is not real, remove the arrow.</a:t>
-            </a:r>
-            <a:endParaRPr lang="en-US"/>
-          </a:p>
-        </p:txBody>
-      </p:sp>
-      <p:sp>
-        <p:nvSpPr>
-          <p:cNvPr id="29" name="visual-note"/>
-          <p:cNvSpPr/>
-          <p:nvPr/>
-        </p:nvSpPr>
-        <p:spPr>
-          <a:xfrm xmlns:a="http://schemas.openxmlformats.org/drawingml/2006/main">
-            <a:off x="8858250" y="3333750"/>
-            <a:ext cx="4762500" cy="2381250"/>
-          </a:xfrm>
-          <a:prstGeom xmlns:a="http://schemas.openxmlformats.org/drawingml/2006/main" prst="rect">
-            <a:avLst/>
-          </a:prstGeom>
-          <a:solidFill xmlns:a="http://schemas.openxmlformats.org/drawingml/2006/main">
-            <a:srgbClr val="131A24"/>
-          </a:solidFill>
-          <a:ln xmlns:a="http://schemas.openxmlformats.org/drawingml/2006/main" w="12700">
-            <a:solidFill>
-              <a:srgbClr val="909DA9"/>
-            </a:solidFill>
-            <a:prstDash val="solid"/>
-          </a:ln>
-        </p:spPr>
-        <p:txBody>
-          <a:bodyPr xmlns:a="http://schemas.openxmlformats.org/drawingml/2006/main" wrap="square" lIns="0" tIns="0" rIns="0" bIns="0" anchor="t"/>
-          <a:lstStyle xmlns:a="http://schemas.openxmlformats.org/drawingml/2006/main"/>
-          <a:p xmlns:a="http://schemas.openxmlformats.org/drawingml/2006/main">
-            <a:r>
-              <a:rPr lang="en-US"/>
-              <a:t/>
-            </a:r>
-            <a:endParaRPr lang="en-US"/>
-          </a:p>
-        </p:txBody>
-      </p:sp>
-      <p:sp>
-        <p:nvSpPr>
-          <p:cNvPr id="30" name="visual-note-label"/>
-          <p:cNvSpPr txBox="1"/>
-          <p:nvPr/>
-        </p:nvSpPr>
-        <p:spPr>
-          <a:xfrm xmlns:a="http://schemas.openxmlformats.org/drawingml/2006/main">
-            <a:off x="9239250" y="3695700"/>
-            <a:ext cx="4000500" cy="228600"/>
-          </a:xfrm>
-          <a:prstGeom xmlns:a="http://schemas.openxmlformats.org/drawingml/2006/main" prst="rect">
-            <a:avLst/>
-          </a:prstGeom>
-          <a:noFill xmlns:a="http://schemas.openxmlformats.org/drawingml/2006/main"/>
-          <a:ln xmlns:a="http://schemas.openxmlformats.org/drawingml/2006/main" w="0">
-            <a:noFill/>
-          </a:ln>
-        </p:spPr>
-        <p:txBody>
-          <a:bodyPr xmlns:a="http://schemas.openxmlformats.org/drawingml/2006/main" wrap="square" lIns="0" tIns="0" rIns="0" bIns="0" anchor="t"/>
-          <a:lstStyle xmlns:a="http://schemas.openxmlformats.org/drawingml/2006/main"/>
-          <a:p xmlns:a="http://schemas.openxmlformats.org/drawingml/2006/main">
-            <a:r>
-              <a:rPr lang="en-US" sz="1125" b="1">
-                <a:solidFill>
-                  <a:srgbClr val="0C9ED0"/>
-                </a:solidFill>
-                <a:latin typeface="Arial"/>
-                <a:ea typeface="Arial"/>
-              </a:rPr>
-              <a:t>CARRIER</a:t>
-            </a:r>
-            <a:endParaRPr lang="en-US"/>
-          </a:p>
-        </p:txBody>
-      </p:sp>
-      <p:sp>
-        <p:nvSpPr>
-          <p:cNvPr id="31" name="visual-note-text"/>
-          <p:cNvSpPr txBox="1"/>
-          <p:nvPr/>
-        </p:nvSpPr>
-        <p:spPr>
-          <a:xfrm xmlns:a="http://schemas.openxmlformats.org/drawingml/2006/main">
-            <a:off x="9239250" y="4171950"/>
-            <a:ext cx="4000500" cy="723900"/>
-          </a:xfrm>
-          <a:prstGeom xmlns:a="http://schemas.openxmlformats.org/drawingml/2006/main" prst="rect">
-            <a:avLst/>
-          </a:prstGeom>
-          <a:noFill xmlns:a="http://schemas.openxmlformats.org/drawingml/2006/main"/>
-          <a:ln xmlns:a="http://schemas.openxmlformats.org/drawingml/2006/main" w="0">
-            <a:noFill/>
-          </a:ln>
-        </p:spPr>
-        <p:txBody>
-          <a:bodyPr xmlns:a="http://schemas.openxmlformats.org/drawingml/2006/main" wrap="square" lIns="0" tIns="0" rIns="0" bIns="0" anchor="t"/>
-          <a:lstStyle xmlns:a="http://schemas.openxmlformats.org/drawingml/2006/main"/>
-          <a:p xmlns:a="http://schemas.openxmlformats.org/drawingml/2006/main">
-            <a:r>
-              <a:rPr lang="en-US" sz="2100" b="1">
-                <a:solidFill>
-                  <a:srgbClr val="17324B"/>
-                </a:solidFill>
-                <a:latin typeface="Arial"/>
-                <a:ea typeface="Arial"/>
-              </a:rPr>
-              <a:t>Choice before inventory</a:t>
-            </a:r>
-            <a:endParaRPr lang="en-US"/>
-          </a:p>
-        </p:txBody>
-      </p:sp>
-      <p:sp>
-        <p:nvSpPr>
-          <p:cNvPr id="32" name="visual-note-foot"/>
-          <p:cNvSpPr txBox="1"/>
-          <p:nvPr/>
-        </p:nvSpPr>
-        <p:spPr>
-          <a:xfrm xmlns:a="http://schemas.openxmlformats.org/drawingml/2006/main">
-            <a:off x="9239250" y="5219700"/>
-            <a:ext cx="4000500" cy="457200"/>
-          </a:xfrm>
-          <a:prstGeom xmlns:a="http://schemas.openxmlformats.org/drawingml/2006/main" prst="rect">
-            <a:avLst/>
-          </a:prstGeom>
-          <a:noFill xmlns:a="http://schemas.openxmlformats.org/drawingml/2006/main"/>
-          <a:ln xmlns:a="http://schemas.openxmlformats.org/drawingml/2006/main" w="0">
-            <a:noFill/>
-          </a:ln>
-        </p:spPr>
-        <p:txBody>
-          <a:bodyPr xmlns:a="http://schemas.openxmlformats.org/drawingml/2006/main" wrap="square" lIns="0" tIns="0" rIns="0" bIns="0" anchor="t"/>
-          <a:lstStyle xmlns:a="http://schemas.openxmlformats.org/drawingml/2006/main"/>
-          <a:p xmlns:a="http://schemas.openxmlformats.org/drawingml/2006/main">
-            <a:r>
-              <a:rPr lang="en-US" sz="1200">
-                <a:solidFill>
-                  <a:srgbClr val="909DA9"/>
-                </a:solidFill>
-                <a:latin typeface="Arial"/>
-                <a:ea typeface="Arial"/>
-              </a:rPr>
-              <a:t>Crop, contrast and source role are reviewed before delivery.</a:t>
-            </a:r>
-            <a:endParaRPr lang="en-US"/>
-          </a:p>
-        </p:txBody>
-      </p:sp>
-      <p:sp>
-        <p:nvSpPr>
-          <p:cNvPr id="33" name="source"/>
+              <a:t>Approve one lever</a:t>
+            </a:r>
+            <a:endParaRPr lang="en-US"/>
+          </a:p>
+        </p:txBody>
+      </p:sp>
+      <p:sp>
+        <p:nvSpPr>
+          <p:cNvPr id="9" name="source"/>
           <p:cNvSpPr txBox="1"/>
           <p:nvPr/>
         </p:nvSpPr>
@@ -4908,7 +4042,7 @@
       </p:sp>
       <p:sp>
         <p:nvSpPr>
-          <p:cNvPr id="34" name="page-number"/>
+          <p:cNvPr id="10" name="page-number"/>
           <p:cNvSpPr txBox="1"/>
           <p:nvPr/>
         </p:nvSpPr>

--- a/skills/presentation-template-library/skills/artifact-template-coastal-analysis/assets/reference.pptx
+++ b/skills/presentation-template-library/skills/artifact-template-coastal-analysis/assets/reference.pptx
@@ -2260,7 +2260,7 @@
         </p:xfrm>
         <a:graphic xmlns:a="http://schemas.openxmlformats.org/drawingml/2006/main">
           <a:graphicData uri="http://schemas.openxmlformats.org/drawingml/2006/chart">
-            <c:chart xmlns:r="http://schemas.openxmlformats.org/officeDocument/2006/relationships" xmlns:c="http://schemas.openxmlformats.org/drawingml/2006/chart" r:id="R3d2daa19b25e4e9b"/>
+            <c:chart xmlns:r="http://schemas.openxmlformats.org/officeDocument/2006/relationships" xmlns:c="http://schemas.openxmlformats.org/drawingml/2006/chart" r:id="R2a5210c436ee4ee8"/>
           </a:graphicData>
         </a:graphic>
       </p:graphicFrame>

--- a/skills/presentation-template-library/skills/artifact-template-coastal-analysis/assets/reference.pptx
+++ b/skills/presentation-template-library/skills/artifact-template-coastal-analysis/assets/reference.pptx
@@ -2260,7 +2260,7 @@
         </p:xfrm>
         <a:graphic xmlns:a="http://schemas.openxmlformats.org/drawingml/2006/main">
           <a:graphicData uri="http://schemas.openxmlformats.org/drawingml/2006/chart">
-            <c:chart xmlns:r="http://schemas.openxmlformats.org/officeDocument/2006/relationships" xmlns:c="http://schemas.openxmlformats.org/drawingml/2006/chart" r:id="R2a5210c436ee4ee8"/>
+            <c:chart xmlns:r="http://schemas.openxmlformats.org/officeDocument/2006/relationships" xmlns:c="http://schemas.openxmlformats.org/drawingml/2006/chart" r:id="R725a217bd3624738"/>
           </a:graphicData>
         </a:graphic>
       </p:graphicFrame>

--- a/skills/presentation-template-library/skills/artifact-template-coastal-analysis/assets/reference.pptx
+++ b/skills/presentation-template-library/skills/artifact-template-coastal-analysis/assets/reference.pptx
@@ -194,170 +194,13 @@
 </a:theme>
 </file>
 
-<file path=ppt/slides/charts/chart1.xml><?xml version="1.0" encoding="utf-8"?>
-<c:chartSpace xmlns:c="http://schemas.openxmlformats.org/drawingml/2006/chart" xmlns:a="http://schemas.openxmlformats.org/drawingml/2006/main">
-  <c:chart>
-    <c:title>
-      <c:tx>
-        <c:rich>
-          <a:bodyPr/>
-          <a:lstStyle/>
-          <a:p>
-            <a:r>
-              <a:t>Observed signal by cohort</a:t>
-            </a:r>
-          </a:p>
-        </c:rich>
-      </c:tx>
-      <c:layout/>
-    </c:title>
-    <c:plotArea>
-      <c:layout/>
-      <c:barChart>
-        <c:barDir val="col"/>
-        <c:grouping val="clustered"/>
-        <c:ser>
-          <c:idx val="0"/>
-          <c:order val="0"/>
-          <c:tx>
-            <c:v>Observed</c:v>
-          </c:tx>
-          <c:spPr>
-            <a:solidFill>
-              <a:srgbClr val="0C9ED0"/>
-            </a:solidFill>
-          </c:spPr>
-          <c:cat>
-            <c:strLit>
-              <c:ptCount val="5"/>
-              <c:pt idx="0">
-                <c:v>Baseline</c:v>
-              </c:pt>
-              <c:pt idx="1">
-                <c:v>Phase 1</c:v>
-              </c:pt>
-              <c:pt idx="2">
-                <c:v>Phase 2</c:v>
-              </c:pt>
-              <c:pt idx="3">
-                <c:v>Phase 3</c:v>
-              </c:pt>
-              <c:pt idx="4">
-                <c:v>Close</c:v>
-              </c:pt>
-            </c:strLit>
-          </c:cat>
-          <c:val>
-            <c:numLit>
-              <c:formatCode>General</c:formatCode>
-              <c:ptCount val="5"/>
-              <c:pt idx="0">
-                <c:v>42</c:v>
-              </c:pt>
-              <c:pt idx="1">
-                <c:v>51</c:v>
-              </c:pt>
-              <c:pt idx="2">
-                <c:v>58</c:v>
-              </c:pt>
-              <c:pt idx="3">
-                <c:v>64</c:v>
-              </c:pt>
-              <c:pt idx="4">
-                <c:v>68</c:v>
-              </c:pt>
-            </c:numLit>
-          </c:val>
-        </c:ser>
-        <c:ser>
-          <c:idx val="1"/>
-          <c:order val="1"/>
-          <c:tx>
-            <c:v>Reference</c:v>
-          </c:tx>
-          <c:spPr>
-            <a:solidFill>
-              <a:srgbClr val="909DA9"/>
-            </a:solidFill>
-          </c:spPr>
-          <c:cat>
-            <c:strLit>
-              <c:ptCount val="5"/>
-              <c:pt idx="0">
-                <c:v>Baseline</c:v>
-              </c:pt>
-              <c:pt idx="1">
-                <c:v>Phase 1</c:v>
-              </c:pt>
-              <c:pt idx="2">
-                <c:v>Phase 2</c:v>
-              </c:pt>
-              <c:pt idx="3">
-                <c:v>Phase 3</c:v>
-              </c:pt>
-              <c:pt idx="4">
-                <c:v>Close</c:v>
-              </c:pt>
-            </c:strLit>
-          </c:cat>
-          <c:val>
-            <c:numLit>
-              <c:formatCode>General</c:formatCode>
-              <c:ptCount val="5"/>
-              <c:pt idx="0">
-                <c:v>40</c:v>
-              </c:pt>
-              <c:pt idx="1">
-                <c:v>43</c:v>
-              </c:pt>
-              <c:pt idx="2">
-                <c:v>45</c:v>
-              </c:pt>
-              <c:pt idx="3">
-                <c:v>47</c:v>
-              </c:pt>
-              <c:pt idx="4">
-                <c:v>48</c:v>
-              </c:pt>
-            </c:numLit>
-          </c:val>
-        </c:ser>
-        <c:axId val="1"/>
-        <c:axId val="2"/>
-      </c:barChart>
-      <c:catAx>
-        <c:axId val="1"/>
-        <c:scaling>
-          <c:orientation val="minMax"/>
-        </c:scaling>
-        <c:axPos val="b"/>
-        <c:crossAx val="2"/>
-      </c:catAx>
-      <c:valAx>
-        <c:axId val="2"/>
-        <c:scaling>
-          <c:orientation val="minMax"/>
-        </c:scaling>
-        <c:axPos val="l"/>
-        <c:crossAx val="1"/>
-      </c:valAx>
-    </c:plotArea>
-    <c:legend>
-      <c:legendPos val="r"/>
-      <c:layout/>
-    </c:legend>
-    <c:plotVisOnly val="1"/>
-  </c:chart>
-</c:chartSpace>
-</file>
-
 <file path=ppt/slides/slide1.xml><?xml version="1.0" encoding="utf-8"?>
 <p:sld xmlns:p="http://schemas.openxmlformats.org/presentationml/2006/main">
   <p:cSld name="Opening claim">
     <p:bg>
       <p:bgPr>
         <a:blipFill xmlns:a="http://schemas.openxmlformats.org/drawingml/2006/main">
-          <a:blip xmlns:r="http://schemas.openxmlformats.org/officeDocument/2006/relationships" r:embed="rIdOfficeKitImage092dd3ee80187530_1"/>
+          <a:blip xmlns:r="http://schemas.openxmlformats.org/officeDocument/2006/relationships" r:embed="rIdOfficeKitImage5e425a7c66b022d4_1"/>
           <a:stretch>
             <a:fillRect/>
           </a:stretch>
@@ -2246,114 +2089,61 @@
           </a:p>
         </p:txBody>
       </p:sp>
-      <p:graphicFrame>
-        <p:nvGraphicFramePr>
-          <p:cNvPr id="8" name="evidence-chart"/>
-          <p:cNvGraphicFramePr>
-            <a:graphicFrameLocks xmlns:a="http://schemas.openxmlformats.org/drawingml/2006/main" noGrp="1"/>
-          </p:cNvGraphicFramePr>
-          <p:nvPr/>
-        </p:nvGraphicFramePr>
-        <p:xfrm>
-          <a:off xmlns:a="http://schemas.openxmlformats.org/drawingml/2006/main" x="1047750" y="3048000"/>
-          <a:ext xmlns:a="http://schemas.openxmlformats.org/drawingml/2006/main" cx="7905750" cy="3000375"/>
-        </p:xfrm>
-        <a:graphic xmlns:a="http://schemas.openxmlformats.org/drawingml/2006/main">
-          <a:graphicData uri="http://schemas.openxmlformats.org/drawingml/2006/chart">
-            <c:chart xmlns:r="http://schemas.openxmlformats.org/officeDocument/2006/relationships" xmlns:c="http://schemas.openxmlformats.org/drawingml/2006/chart" r:id="R725a217bd3624738"/>
-          </a:graphicData>
-        </a:graphic>
-      </p:graphicFrame>
-      <p:sp>
-        <p:nvSpPr>
-          <p:cNvPr id="9" name="metric"/>
-          <p:cNvSpPr txBox="1"/>
-          <p:nvPr/>
-        </p:nvSpPr>
-        <p:spPr>
-          <a:xfrm xmlns:a="http://schemas.openxmlformats.org/drawingml/2006/main">
-            <a:off x="9906000" y="3333750"/>
-            <a:ext cx="2667000" cy="781050"/>
-          </a:xfrm>
-          <a:prstGeom xmlns:a="http://schemas.openxmlformats.org/drawingml/2006/main" prst="rect">
-            <a:avLst/>
-          </a:prstGeom>
-          <a:noFill xmlns:a="http://schemas.openxmlformats.org/drawingml/2006/main"/>
-          <a:ln xmlns:a="http://schemas.openxmlformats.org/drawingml/2006/main" w="0">
-            <a:noFill/>
-          </a:ln>
-        </p:spPr>
-        <p:txBody>
-          <a:bodyPr xmlns:a="http://schemas.openxmlformats.org/drawingml/2006/main" wrap="square" lIns="0" tIns="0" rIns="0" bIns="0" anchor="t"/>
-          <a:lstStyle xmlns:a="http://schemas.openxmlformats.org/drawingml/2006/main"/>
-          <a:p xmlns:a="http://schemas.openxmlformats.org/drawingml/2006/main">
-            <a:r>
-              <a:rPr lang="en-US" sz="4800" b="1">
+      <p:sp>
+        <p:nvSpPr>
+          <p:cNvPr id="8" name="map-label"/>
+          <p:cNvSpPr txBox="1"/>
+          <p:nvPr/>
+        </p:nvSpPr>
+        <p:spPr>
+          <a:xfrm xmlns:a="http://schemas.openxmlformats.org/drawingml/2006/main">
+            <a:off x="1066800" y="3143250"/>
+            <a:ext cx="5143500" cy="209550"/>
+          </a:xfrm>
+          <a:prstGeom xmlns:a="http://schemas.openxmlformats.org/drawingml/2006/main" prst="rect">
+            <a:avLst/>
+          </a:prstGeom>
+          <a:noFill xmlns:a="http://schemas.openxmlformats.org/drawingml/2006/main"/>
+          <a:ln xmlns:a="http://schemas.openxmlformats.org/drawingml/2006/main" w="0">
+            <a:noFill/>
+          </a:ln>
+        </p:spPr>
+        <p:txBody>
+          <a:bodyPr xmlns:a="http://schemas.openxmlformats.org/drawingml/2006/main" wrap="square" lIns="0" tIns="0" rIns="0" bIns="0" anchor="t"/>
+          <a:lstStyle xmlns:a="http://schemas.openxmlformats.org/drawingml/2006/main"/>
+          <a:p xmlns:a="http://schemas.openxmlformats.org/drawingml/2006/main">
+            <a:r>
+              <a:rPr lang="en-US" sz="1050" b="1">
                 <a:solidFill>
                   <a:srgbClr val="0C9ED0"/>
                 </a:solidFill>
                 <a:latin typeface="Arial"/>
                 <a:ea typeface="Arial"/>
               </a:rPr>
-              <a:t>68</a:t>
-            </a:r>
-            <a:endParaRPr lang="en-US"/>
-          </a:p>
-        </p:txBody>
-      </p:sp>
-      <p:sp>
-        <p:nvSpPr>
-          <p:cNvPr id="10" name="metric-label"/>
-          <p:cNvSpPr txBox="1"/>
-          <p:nvPr/>
-        </p:nvSpPr>
-        <p:spPr>
-          <a:xfrm xmlns:a="http://schemas.openxmlformats.org/drawingml/2006/main">
-            <a:off x="9906000" y="4143375"/>
-            <a:ext cx="3143250" cy="285750"/>
-          </a:xfrm>
-          <a:prstGeom xmlns:a="http://schemas.openxmlformats.org/drawingml/2006/main" prst="rect">
-            <a:avLst/>
-          </a:prstGeom>
-          <a:noFill xmlns:a="http://schemas.openxmlformats.org/drawingml/2006/main"/>
-          <a:ln xmlns:a="http://schemas.openxmlformats.org/drawingml/2006/main" w="0">
-            <a:noFill/>
-          </a:ln>
-        </p:spPr>
-        <p:txBody>
-          <a:bodyPr xmlns:a="http://schemas.openxmlformats.org/drawingml/2006/main" wrap="square" lIns="0" tIns="0" rIns="0" bIns="0" anchor="t"/>
-          <a:lstStyle xmlns:a="http://schemas.openxmlformats.org/drawingml/2006/main"/>
-          <a:p xmlns:a="http://schemas.openxmlformats.org/drawingml/2006/main">
-            <a:r>
-              <a:rPr lang="en-US" sz="1350">
-                <a:solidFill>
-                  <a:srgbClr val="909DA9"/>
-                </a:solidFill>
-                <a:latin typeface="Arial"/>
-                <a:ea typeface="Arial"/>
-              </a:rPr>
-              <a:t>decision confidence · current case</a:t>
-            </a:r>
-            <a:endParaRPr lang="en-US"/>
-          </a:p>
-        </p:txBody>
-      </p:sp>
-      <p:sp>
-        <p:nvSpPr>
-          <p:cNvPr id="11" name="rail-rule"/>
+              <a:t>DIRECT-LABELLED DISTRIBUTION</a:t>
+            </a:r>
+            <a:endParaRPr lang="en-US"/>
+          </a:p>
+        </p:txBody>
+      </p:sp>
+      <p:sp>
+        <p:nvSpPr>
+          <p:cNvPr id="9" name="map-field"/>
           <p:cNvSpPr/>
           <p:nvPr/>
         </p:nvSpPr>
         <p:spPr>
           <a:xfrm xmlns:a="http://schemas.openxmlformats.org/drawingml/2006/main">
-            <a:off x="9906000" y="4810125"/>
-            <a:ext cx="3762375" cy="0"/>
-          </a:xfrm>
-          <a:prstGeom xmlns:a="http://schemas.openxmlformats.org/drawingml/2006/main" prst="line">
-            <a:avLst/>
-          </a:prstGeom>
-          <a:noFill xmlns:a="http://schemas.openxmlformats.org/drawingml/2006/main"/>
-          <a:ln xmlns:a="http://schemas.openxmlformats.org/drawingml/2006/main" w="25400">
+            <a:off x="1066800" y="3524250"/>
+            <a:ext cx="7524750" cy="2647950"/>
+          </a:xfrm>
+          <a:prstGeom xmlns:a="http://schemas.openxmlformats.org/drawingml/2006/main" prst="rect">
+            <a:avLst/>
+          </a:prstGeom>
+          <a:solidFill xmlns:a="http://schemas.openxmlformats.org/drawingml/2006/main">
+            <a:srgbClr val="FAECE6"/>
+          </a:solidFill>
+          <a:ln xmlns:a="http://schemas.openxmlformats.org/drawingml/2006/main" w="12700">
             <a:solidFill>
               <a:srgbClr val="909DA9"/>
             </a:solidFill>
@@ -2374,44 +2164,630 @@
       </p:sp>
       <p:sp>
         <p:nvSpPr>
-          <p:cNvPr id="12" name="read-through"/>
-          <p:cNvSpPr txBox="1"/>
-          <p:nvPr/>
-        </p:nvSpPr>
-        <p:spPr>
-          <a:xfrm xmlns:a="http://schemas.openxmlformats.org/drawingml/2006/main">
-            <a:off x="9906000" y="5143500"/>
-            <a:ext cx="3429000" cy="742950"/>
-          </a:xfrm>
-          <a:prstGeom xmlns:a="http://schemas.openxmlformats.org/drawingml/2006/main" prst="rect">
-            <a:avLst/>
-          </a:prstGeom>
-          <a:noFill xmlns:a="http://schemas.openxmlformats.org/drawingml/2006/main"/>
-          <a:ln xmlns:a="http://schemas.openxmlformats.org/drawingml/2006/main" w="0">
-            <a:noFill/>
-          </a:ln>
-        </p:spPr>
-        <p:txBody>
-          <a:bodyPr xmlns:a="http://schemas.openxmlformats.org/drawingml/2006/main" wrap="square" lIns="0" tIns="0" rIns="0" bIns="0" anchor="t"/>
-          <a:lstStyle xmlns:a="http://schemas.openxmlformats.org/drawingml/2006/main"/>
-          <a:p xmlns:a="http://schemas.openxmlformats.org/drawingml/2006/main">
-            <a:r>
-              <a:rPr lang="en-US" sz="1650" b="1">
+          <p:cNvPr id="10" name="map-region-0"/>
+          <p:cNvSpPr/>
+          <p:nvPr/>
+        </p:nvSpPr>
+        <p:spPr>
+          <a:xfrm xmlns:a="http://schemas.openxmlformats.org/drawingml/2006/main">
+            <a:off x="1619250" y="4324350"/>
+            <a:ext cx="1428750" cy="704850"/>
+          </a:xfrm>
+          <a:prstGeom xmlns:a="http://schemas.openxmlformats.org/drawingml/2006/main" prst="rect">
+            <a:avLst/>
+          </a:prstGeom>
+          <a:solidFill xmlns:a="http://schemas.openxmlformats.org/drawingml/2006/main">
+            <a:srgbClr val="DE784B">
+              <a:alpha val="48000"/>
+            </a:srgbClr>
+          </a:solidFill>
+          <a:ln xmlns:a="http://schemas.openxmlformats.org/drawingml/2006/main" w="25400">
+            <a:solidFill>
+              <a:srgbClr val="FFFFFF"/>
+            </a:solidFill>
+            <a:prstDash val="solid"/>
+          </a:ln>
+        </p:spPr>
+        <p:txBody>
+          <a:bodyPr xmlns:a="http://schemas.openxmlformats.org/drawingml/2006/main" wrap="square" lIns="0" tIns="0" rIns="0" bIns="0" anchor="t"/>
+          <a:lstStyle xmlns:a="http://schemas.openxmlformats.org/drawingml/2006/main"/>
+          <a:p xmlns:a="http://schemas.openxmlformats.org/drawingml/2006/main">
+            <a:r>
+              <a:rPr lang="en-US"/>
+              <a:t/>
+            </a:r>
+            <a:endParaRPr lang="en-US"/>
+          </a:p>
+        </p:txBody>
+      </p:sp>
+      <p:sp>
+        <p:nvSpPr>
+          <p:cNvPr id="11" name="map-region-1"/>
+          <p:cNvSpPr/>
+          <p:nvPr/>
+        </p:nvSpPr>
+        <p:spPr>
+          <a:xfrm xmlns:a="http://schemas.openxmlformats.org/drawingml/2006/main">
+            <a:off x="3295650" y="3962400"/>
+            <a:ext cx="1790700" cy="876300"/>
+          </a:xfrm>
+          <a:prstGeom xmlns:a="http://schemas.openxmlformats.org/drawingml/2006/main" prst="rect">
+            <a:avLst/>
+          </a:prstGeom>
+          <a:solidFill xmlns:a="http://schemas.openxmlformats.org/drawingml/2006/main">
+            <a:srgbClr val="0C9ED0">
+              <a:alpha val="76000"/>
+            </a:srgbClr>
+          </a:solidFill>
+          <a:ln xmlns:a="http://schemas.openxmlformats.org/drawingml/2006/main" w="25400">
+            <a:solidFill>
+              <a:srgbClr val="FFFFFF"/>
+            </a:solidFill>
+            <a:prstDash val="solid"/>
+          </a:ln>
+        </p:spPr>
+        <p:txBody>
+          <a:bodyPr xmlns:a="http://schemas.openxmlformats.org/drawingml/2006/main" wrap="square" lIns="0" tIns="0" rIns="0" bIns="0" anchor="t"/>
+          <a:lstStyle xmlns:a="http://schemas.openxmlformats.org/drawingml/2006/main"/>
+          <a:p xmlns:a="http://schemas.openxmlformats.org/drawingml/2006/main">
+            <a:r>
+              <a:rPr lang="en-US"/>
+              <a:t/>
+            </a:r>
+            <a:endParaRPr lang="en-US"/>
+          </a:p>
+        </p:txBody>
+      </p:sp>
+      <p:sp>
+        <p:nvSpPr>
+          <p:cNvPr id="12" name="map-region-2"/>
+          <p:cNvSpPr/>
+          <p:nvPr/>
+        </p:nvSpPr>
+        <p:spPr>
+          <a:xfrm xmlns:a="http://schemas.openxmlformats.org/drawingml/2006/main">
+            <a:off x="5295900" y="4457700"/>
+            <a:ext cx="1200150" cy="666750"/>
+          </a:xfrm>
+          <a:prstGeom xmlns:a="http://schemas.openxmlformats.org/drawingml/2006/main" prst="rect">
+            <a:avLst/>
+          </a:prstGeom>
+          <a:solidFill xmlns:a="http://schemas.openxmlformats.org/drawingml/2006/main">
+            <a:srgbClr val="DE784B">
+              <a:alpha val="48000"/>
+            </a:srgbClr>
+          </a:solidFill>
+          <a:ln xmlns:a="http://schemas.openxmlformats.org/drawingml/2006/main" w="25400">
+            <a:solidFill>
+              <a:srgbClr val="FFFFFF"/>
+            </a:solidFill>
+            <a:prstDash val="solid"/>
+          </a:ln>
+        </p:spPr>
+        <p:txBody>
+          <a:bodyPr xmlns:a="http://schemas.openxmlformats.org/drawingml/2006/main" wrap="square" lIns="0" tIns="0" rIns="0" bIns="0" anchor="t"/>
+          <a:lstStyle xmlns:a="http://schemas.openxmlformats.org/drawingml/2006/main"/>
+          <a:p xmlns:a="http://schemas.openxmlformats.org/drawingml/2006/main">
+            <a:r>
+              <a:rPr lang="en-US"/>
+              <a:t/>
+            </a:r>
+            <a:endParaRPr lang="en-US"/>
+          </a:p>
+        </p:txBody>
+      </p:sp>
+      <p:sp>
+        <p:nvSpPr>
+          <p:cNvPr id="13" name="map-region-3"/>
+          <p:cNvSpPr/>
+          <p:nvPr/>
+        </p:nvSpPr>
+        <p:spPr>
+          <a:xfrm xmlns:a="http://schemas.openxmlformats.org/drawingml/2006/main">
+            <a:off x="6705600" y="3848100"/>
+            <a:ext cx="1238250" cy="952500"/>
+          </a:xfrm>
+          <a:prstGeom xmlns:a="http://schemas.openxmlformats.org/drawingml/2006/main" prst="rect">
+            <a:avLst/>
+          </a:prstGeom>
+          <a:solidFill xmlns:a="http://schemas.openxmlformats.org/drawingml/2006/main">
+            <a:srgbClr val="0C9ED0">
+              <a:alpha val="76000"/>
+            </a:srgbClr>
+          </a:solidFill>
+          <a:ln xmlns:a="http://schemas.openxmlformats.org/drawingml/2006/main" w="25400">
+            <a:solidFill>
+              <a:srgbClr val="FFFFFF"/>
+            </a:solidFill>
+            <a:prstDash val="solid"/>
+          </a:ln>
+        </p:spPr>
+        <p:txBody>
+          <a:bodyPr xmlns:a="http://schemas.openxmlformats.org/drawingml/2006/main" wrap="square" lIns="0" tIns="0" rIns="0" bIns="0" anchor="t"/>
+          <a:lstStyle xmlns:a="http://schemas.openxmlformats.org/drawingml/2006/main"/>
+          <a:p xmlns:a="http://schemas.openxmlformats.org/drawingml/2006/main">
+            <a:r>
+              <a:rPr lang="en-US"/>
+              <a:t/>
+            </a:r>
+            <a:endParaRPr lang="en-US"/>
+          </a:p>
+        </p:txBody>
+      </p:sp>
+      <p:sp>
+        <p:nvSpPr>
+          <p:cNvPr id="14" name="map-region-4"/>
+          <p:cNvSpPr/>
+          <p:nvPr/>
+        </p:nvSpPr>
+        <p:spPr>
+          <a:xfrm xmlns:a="http://schemas.openxmlformats.org/drawingml/2006/main">
+            <a:off x="2590800" y="5219700"/>
+            <a:ext cx="1943100" cy="590550"/>
+          </a:xfrm>
+          <a:prstGeom xmlns:a="http://schemas.openxmlformats.org/drawingml/2006/main" prst="rect">
+            <a:avLst/>
+          </a:prstGeom>
+          <a:solidFill xmlns:a="http://schemas.openxmlformats.org/drawingml/2006/main">
+            <a:srgbClr val="909DA9">
+              <a:alpha val="48000"/>
+            </a:srgbClr>
+          </a:solidFill>
+          <a:ln xmlns:a="http://schemas.openxmlformats.org/drawingml/2006/main" w="25400">
+            <a:solidFill>
+              <a:srgbClr val="FFFFFF"/>
+            </a:solidFill>
+            <a:prstDash val="solid"/>
+          </a:ln>
+        </p:spPr>
+        <p:txBody>
+          <a:bodyPr xmlns:a="http://schemas.openxmlformats.org/drawingml/2006/main" wrap="square" lIns="0" tIns="0" rIns="0" bIns="0" anchor="t"/>
+          <a:lstStyle xmlns:a="http://schemas.openxmlformats.org/drawingml/2006/main"/>
+          <a:p xmlns:a="http://schemas.openxmlformats.org/drawingml/2006/main">
+            <a:r>
+              <a:rPr lang="en-US"/>
+              <a:t/>
+            </a:r>
+            <a:endParaRPr lang="en-US"/>
+          </a:p>
+        </p:txBody>
+      </p:sp>
+      <p:sp>
+        <p:nvSpPr>
+          <p:cNvPr id="15" name="map-region-5"/>
+          <p:cNvSpPr/>
+          <p:nvPr/>
+        </p:nvSpPr>
+        <p:spPr>
+          <a:xfrm xmlns:a="http://schemas.openxmlformats.org/drawingml/2006/main">
+            <a:off x="4895850" y="5334000"/>
+            <a:ext cx="1447800" cy="514350"/>
+          </a:xfrm>
+          <a:prstGeom xmlns:a="http://schemas.openxmlformats.org/drawingml/2006/main" prst="rect">
+            <a:avLst/>
+          </a:prstGeom>
+          <a:solidFill xmlns:a="http://schemas.openxmlformats.org/drawingml/2006/main">
+            <a:srgbClr val="DE784B">
+              <a:alpha val="76000"/>
+            </a:srgbClr>
+          </a:solidFill>
+          <a:ln xmlns:a="http://schemas.openxmlformats.org/drawingml/2006/main" w="25400">
+            <a:solidFill>
+              <a:srgbClr val="FFFFFF"/>
+            </a:solidFill>
+            <a:prstDash val="solid"/>
+          </a:ln>
+        </p:spPr>
+        <p:txBody>
+          <a:bodyPr xmlns:a="http://schemas.openxmlformats.org/drawingml/2006/main" wrap="square" lIns="0" tIns="0" rIns="0" bIns="0" anchor="t"/>
+          <a:lstStyle xmlns:a="http://schemas.openxmlformats.org/drawingml/2006/main"/>
+          <a:p xmlns:a="http://schemas.openxmlformats.org/drawingml/2006/main">
+            <a:r>
+              <a:rPr lang="en-US"/>
+              <a:t/>
+            </a:r>
+            <a:endParaRPr lang="en-US"/>
+          </a:p>
+        </p:txBody>
+      </p:sp>
+      <p:sp>
+        <p:nvSpPr>
+          <p:cNvPr id="16" name="map-leader-0"/>
+          <p:cNvSpPr/>
+          <p:nvPr/>
+        </p:nvSpPr>
+        <p:spPr>
+          <a:xfrm xmlns:a="http://schemas.openxmlformats.org/drawingml/2006/main">
+            <a:off x="1943100" y="4362450"/>
+            <a:ext cx="209550" cy="228600"/>
+          </a:xfrm>
+          <a:prstGeom xmlns:a="http://schemas.openxmlformats.org/drawingml/2006/main" prst="line">
+            <a:avLst/>
+          </a:prstGeom>
+          <a:noFill xmlns:a="http://schemas.openxmlformats.org/drawingml/2006/main"/>
+          <a:ln xmlns:a="http://schemas.openxmlformats.org/drawingml/2006/main" w="12700">
+            <a:solidFill>
+              <a:srgbClr val="17324B"/>
+            </a:solidFill>
+            <a:prstDash val="solid"/>
+          </a:ln>
+        </p:spPr>
+        <p:txBody>
+          <a:bodyPr xmlns:a="http://schemas.openxmlformats.org/drawingml/2006/main" wrap="square" lIns="0" tIns="0" rIns="0" bIns="0" anchor="t"/>
+          <a:lstStyle xmlns:a="http://schemas.openxmlformats.org/drawingml/2006/main"/>
+          <a:p xmlns:a="http://schemas.openxmlformats.org/drawingml/2006/main">
+            <a:r>
+              <a:rPr lang="en-US"/>
+              <a:t/>
+            </a:r>
+            <a:endParaRPr lang="en-US"/>
+          </a:p>
+        </p:txBody>
+      </p:sp>
+      <p:sp>
+        <p:nvSpPr>
+          <p:cNvPr id="17" name="map-label-0"/>
+          <p:cNvSpPr txBox="1"/>
+          <p:nvPr/>
+        </p:nvSpPr>
+        <p:spPr>
+          <a:xfrm xmlns:a="http://schemas.openxmlformats.org/drawingml/2006/main">
+            <a:off x="2190750" y="4095750"/>
+            <a:ext cx="1428750" cy="228600"/>
+          </a:xfrm>
+          <a:prstGeom xmlns:a="http://schemas.openxmlformats.org/drawingml/2006/main" prst="rect">
+            <a:avLst/>
+          </a:prstGeom>
+          <a:noFill xmlns:a="http://schemas.openxmlformats.org/drawingml/2006/main"/>
+          <a:ln xmlns:a="http://schemas.openxmlformats.org/drawingml/2006/main" w="0">
+            <a:noFill/>
+          </a:ln>
+        </p:spPr>
+        <p:txBody>
+          <a:bodyPr xmlns:a="http://schemas.openxmlformats.org/drawingml/2006/main" wrap="square" lIns="0" tIns="0" rIns="0" bIns="0" anchor="t"/>
+          <a:lstStyle xmlns:a="http://schemas.openxmlformats.org/drawingml/2006/main"/>
+          <a:p xmlns:a="http://schemas.openxmlformats.org/drawingml/2006/main">
+            <a:r>
+              <a:rPr lang="en-US" sz="1125" b="1">
                 <a:solidFill>
                   <a:srgbClr val="17324B"/>
                 </a:solidFill>
                 <a:latin typeface="Arial"/>
                 <a:ea typeface="Arial"/>
               </a:rPr>
-              <a:t>The next question is which lever moves the constraint, not whether the signal exists.</a:t>
-            </a:r>
-            <a:endParaRPr lang="en-US"/>
-          </a:p>
-        </p:txBody>
-      </p:sp>
-      <p:sp>
-        <p:nvSpPr>
-          <p:cNvPr id="13" name="evidence-band"/>
+              <a:t>North · 42%</a:t>
+            </a:r>
+            <a:endParaRPr lang="en-US"/>
+          </a:p>
+        </p:txBody>
+      </p:sp>
+      <p:sp>
+        <p:nvSpPr>
+          <p:cNvPr id="18" name="map-leader-1"/>
+          <p:cNvSpPr/>
+          <p:nvPr/>
+        </p:nvSpPr>
+        <p:spPr>
+          <a:xfrm xmlns:a="http://schemas.openxmlformats.org/drawingml/2006/main">
+            <a:off x="3676650" y="3981450"/>
+            <a:ext cx="209550" cy="228600"/>
+          </a:xfrm>
+          <a:prstGeom xmlns:a="http://schemas.openxmlformats.org/drawingml/2006/main" prst="line">
+            <a:avLst/>
+          </a:prstGeom>
+          <a:noFill xmlns:a="http://schemas.openxmlformats.org/drawingml/2006/main"/>
+          <a:ln xmlns:a="http://schemas.openxmlformats.org/drawingml/2006/main" w="12700">
+            <a:solidFill>
+              <a:srgbClr val="17324B"/>
+            </a:solidFill>
+            <a:prstDash val="solid"/>
+          </a:ln>
+        </p:spPr>
+        <p:txBody>
+          <a:bodyPr xmlns:a="http://schemas.openxmlformats.org/drawingml/2006/main" wrap="square" lIns="0" tIns="0" rIns="0" bIns="0" anchor="t"/>
+          <a:lstStyle xmlns:a="http://schemas.openxmlformats.org/drawingml/2006/main"/>
+          <a:p xmlns:a="http://schemas.openxmlformats.org/drawingml/2006/main">
+            <a:r>
+              <a:rPr lang="en-US"/>
+              <a:t/>
+            </a:r>
+            <a:endParaRPr lang="en-US"/>
+          </a:p>
+        </p:txBody>
+      </p:sp>
+      <p:sp>
+        <p:nvSpPr>
+          <p:cNvPr id="19" name="map-label-1"/>
+          <p:cNvSpPr txBox="1"/>
+          <p:nvPr/>
+        </p:nvSpPr>
+        <p:spPr>
+          <a:xfrm xmlns:a="http://schemas.openxmlformats.org/drawingml/2006/main">
+            <a:off x="3924300" y="3714750"/>
+            <a:ext cx="1428750" cy="228600"/>
+          </a:xfrm>
+          <a:prstGeom xmlns:a="http://schemas.openxmlformats.org/drawingml/2006/main" prst="rect">
+            <a:avLst/>
+          </a:prstGeom>
+          <a:noFill xmlns:a="http://schemas.openxmlformats.org/drawingml/2006/main"/>
+          <a:ln xmlns:a="http://schemas.openxmlformats.org/drawingml/2006/main" w="0">
+            <a:noFill/>
+          </a:ln>
+        </p:spPr>
+        <p:txBody>
+          <a:bodyPr xmlns:a="http://schemas.openxmlformats.org/drawingml/2006/main" wrap="square" lIns="0" tIns="0" rIns="0" bIns="0" anchor="t"/>
+          <a:lstStyle xmlns:a="http://schemas.openxmlformats.org/drawingml/2006/main"/>
+          <a:p xmlns:a="http://schemas.openxmlformats.org/drawingml/2006/main">
+            <a:r>
+              <a:rPr lang="en-US" sz="1125" b="1">
+                <a:solidFill>
+                  <a:srgbClr val="17324B"/>
+                </a:solidFill>
+                <a:latin typeface="Arial"/>
+                <a:ea typeface="Arial"/>
+              </a:rPr>
+              <a:t>Central · 68%</a:t>
+            </a:r>
+            <a:endParaRPr lang="en-US"/>
+          </a:p>
+        </p:txBody>
+      </p:sp>
+      <p:sp>
+        <p:nvSpPr>
+          <p:cNvPr id="20" name="map-leader-2"/>
+          <p:cNvSpPr/>
+          <p:nvPr/>
+        </p:nvSpPr>
+        <p:spPr>
+          <a:xfrm xmlns:a="http://schemas.openxmlformats.org/drawingml/2006/main">
+            <a:off x="6934200" y="3886200"/>
+            <a:ext cx="209550" cy="228600"/>
+          </a:xfrm>
+          <a:prstGeom xmlns:a="http://schemas.openxmlformats.org/drawingml/2006/main" prst="line">
+            <a:avLst/>
+          </a:prstGeom>
+          <a:noFill xmlns:a="http://schemas.openxmlformats.org/drawingml/2006/main"/>
+          <a:ln xmlns:a="http://schemas.openxmlformats.org/drawingml/2006/main" w="12700">
+            <a:solidFill>
+              <a:srgbClr val="17324B"/>
+            </a:solidFill>
+            <a:prstDash val="solid"/>
+          </a:ln>
+        </p:spPr>
+        <p:txBody>
+          <a:bodyPr xmlns:a="http://schemas.openxmlformats.org/drawingml/2006/main" wrap="square" lIns="0" tIns="0" rIns="0" bIns="0" anchor="t"/>
+          <a:lstStyle xmlns:a="http://schemas.openxmlformats.org/drawingml/2006/main"/>
+          <a:p xmlns:a="http://schemas.openxmlformats.org/drawingml/2006/main">
+            <a:r>
+              <a:rPr lang="en-US"/>
+              <a:t/>
+            </a:r>
+            <a:endParaRPr lang="en-US"/>
+          </a:p>
+        </p:txBody>
+      </p:sp>
+      <p:sp>
+        <p:nvSpPr>
+          <p:cNvPr id="21" name="map-label-2"/>
+          <p:cNvSpPr txBox="1"/>
+          <p:nvPr/>
+        </p:nvSpPr>
+        <p:spPr>
+          <a:xfrm xmlns:a="http://schemas.openxmlformats.org/drawingml/2006/main">
+            <a:off x="7181850" y="3619500"/>
+            <a:ext cx="1428750" cy="228600"/>
+          </a:xfrm>
+          <a:prstGeom xmlns:a="http://schemas.openxmlformats.org/drawingml/2006/main" prst="rect">
+            <a:avLst/>
+          </a:prstGeom>
+          <a:noFill xmlns:a="http://schemas.openxmlformats.org/drawingml/2006/main"/>
+          <a:ln xmlns:a="http://schemas.openxmlformats.org/drawingml/2006/main" w="0">
+            <a:noFill/>
+          </a:ln>
+        </p:spPr>
+        <p:txBody>
+          <a:bodyPr xmlns:a="http://schemas.openxmlformats.org/drawingml/2006/main" wrap="square" lIns="0" tIns="0" rIns="0" bIns="0" anchor="t"/>
+          <a:lstStyle xmlns:a="http://schemas.openxmlformats.org/drawingml/2006/main"/>
+          <a:p xmlns:a="http://schemas.openxmlformats.org/drawingml/2006/main">
+            <a:r>
+              <a:rPr lang="en-US" sz="1125" b="1">
+                <a:solidFill>
+                  <a:srgbClr val="17324B"/>
+                </a:solidFill>
+                <a:latin typeface="Arial"/>
+                <a:ea typeface="Arial"/>
+              </a:rPr>
+              <a:t>East · 55%</a:t>
+            </a:r>
+            <a:endParaRPr lang="en-US"/>
+          </a:p>
+        </p:txBody>
+      </p:sp>
+      <p:sp>
+        <p:nvSpPr>
+          <p:cNvPr id="22" name="map-leader-3"/>
+          <p:cNvSpPr/>
+          <p:nvPr/>
+        </p:nvSpPr>
+        <p:spPr>
+          <a:xfrm xmlns:a="http://schemas.openxmlformats.org/drawingml/2006/main">
+            <a:off x="2952750" y="6343650"/>
+            <a:ext cx="209550" cy="228600"/>
+          </a:xfrm>
+          <a:prstGeom xmlns:a="http://schemas.openxmlformats.org/drawingml/2006/main" prst="line">
+            <a:avLst/>
+          </a:prstGeom>
+          <a:noFill xmlns:a="http://schemas.openxmlformats.org/drawingml/2006/main"/>
+          <a:ln xmlns:a="http://schemas.openxmlformats.org/drawingml/2006/main" w="12700">
+            <a:solidFill>
+              <a:srgbClr val="17324B"/>
+            </a:solidFill>
+            <a:prstDash val="solid"/>
+          </a:ln>
+        </p:spPr>
+        <p:txBody>
+          <a:bodyPr xmlns:a="http://schemas.openxmlformats.org/drawingml/2006/main" wrap="square" lIns="0" tIns="0" rIns="0" bIns="0" anchor="t"/>
+          <a:lstStyle xmlns:a="http://schemas.openxmlformats.org/drawingml/2006/main"/>
+          <a:p xmlns:a="http://schemas.openxmlformats.org/drawingml/2006/main">
+            <a:r>
+              <a:rPr lang="en-US"/>
+              <a:t/>
+            </a:r>
+            <a:endParaRPr lang="en-US"/>
+          </a:p>
+        </p:txBody>
+      </p:sp>
+      <p:sp>
+        <p:nvSpPr>
+          <p:cNvPr id="23" name="map-label-3"/>
+          <p:cNvSpPr txBox="1"/>
+          <p:nvPr/>
+        </p:nvSpPr>
+        <p:spPr>
+          <a:xfrm xmlns:a="http://schemas.openxmlformats.org/drawingml/2006/main">
+            <a:off x="3200400" y="6076950"/>
+            <a:ext cx="1428750" cy="228600"/>
+          </a:xfrm>
+          <a:prstGeom xmlns:a="http://schemas.openxmlformats.org/drawingml/2006/main" prst="rect">
+            <a:avLst/>
+          </a:prstGeom>
+          <a:noFill xmlns:a="http://schemas.openxmlformats.org/drawingml/2006/main"/>
+          <a:ln xmlns:a="http://schemas.openxmlformats.org/drawingml/2006/main" w="0">
+            <a:noFill/>
+          </a:ln>
+        </p:spPr>
+        <p:txBody>
+          <a:bodyPr xmlns:a="http://schemas.openxmlformats.org/drawingml/2006/main" wrap="square" lIns="0" tIns="0" rIns="0" bIns="0" anchor="t"/>
+          <a:lstStyle xmlns:a="http://schemas.openxmlformats.org/drawingml/2006/main"/>
+          <a:p xmlns:a="http://schemas.openxmlformats.org/drawingml/2006/main">
+            <a:r>
+              <a:rPr lang="en-US" sz="1125" b="1">
+                <a:solidFill>
+                  <a:srgbClr val="17324B"/>
+                </a:solidFill>
+                <a:latin typeface="Arial"/>
+                <a:ea typeface="Arial"/>
+              </a:rPr>
+              <a:t>South · 31%</a:t>
+            </a:r>
+            <a:endParaRPr lang="en-US"/>
+          </a:p>
+        </p:txBody>
+      </p:sp>
+      <p:sp>
+        <p:nvSpPr>
+          <p:cNvPr id="24" name="map-read-label"/>
+          <p:cNvSpPr txBox="1"/>
+          <p:nvPr/>
+        </p:nvSpPr>
+        <p:spPr>
+          <a:xfrm xmlns:a="http://schemas.openxmlformats.org/drawingml/2006/main">
+            <a:off x="9906000" y="3333750"/>
+            <a:ext cx="3048000" cy="228600"/>
+          </a:xfrm>
+          <a:prstGeom xmlns:a="http://schemas.openxmlformats.org/drawingml/2006/main" prst="rect">
+            <a:avLst/>
+          </a:prstGeom>
+          <a:noFill xmlns:a="http://schemas.openxmlformats.org/drawingml/2006/main"/>
+          <a:ln xmlns:a="http://schemas.openxmlformats.org/drawingml/2006/main" w="0">
+            <a:noFill/>
+          </a:ln>
+        </p:spPr>
+        <p:txBody>
+          <a:bodyPr xmlns:a="http://schemas.openxmlformats.org/drawingml/2006/main" wrap="square" lIns="0" tIns="0" rIns="0" bIns="0" anchor="t"/>
+          <a:lstStyle xmlns:a="http://schemas.openxmlformats.org/drawingml/2006/main"/>
+          <a:p xmlns:a="http://schemas.openxmlformats.org/drawingml/2006/main">
+            <a:r>
+              <a:rPr lang="en-US" sz="1125" b="1">
+                <a:solidFill>
+                  <a:srgbClr val="0C9ED0"/>
+                </a:solidFill>
+                <a:latin typeface="Arial"/>
+                <a:ea typeface="Arial"/>
+              </a:rPr>
+              <a:t>READ-THROUGH</a:t>
+            </a:r>
+            <a:endParaRPr lang="en-US"/>
+          </a:p>
+        </p:txBody>
+      </p:sp>
+      <p:sp>
+        <p:nvSpPr>
+          <p:cNvPr id="25" name="map-read-title"/>
+          <p:cNvSpPr txBox="1"/>
+          <p:nvPr/>
+        </p:nvSpPr>
+        <p:spPr>
+          <a:xfrm xmlns:a="http://schemas.openxmlformats.org/drawingml/2006/main">
+            <a:off x="9906000" y="3829050"/>
+            <a:ext cx="3429000" cy="723900"/>
+          </a:xfrm>
+          <a:prstGeom xmlns:a="http://schemas.openxmlformats.org/drawingml/2006/main" prst="rect">
+            <a:avLst/>
+          </a:prstGeom>
+          <a:noFill xmlns:a="http://schemas.openxmlformats.org/drawingml/2006/main"/>
+          <a:ln xmlns:a="http://schemas.openxmlformats.org/drawingml/2006/main" w="0">
+            <a:noFill/>
+          </a:ln>
+        </p:spPr>
+        <p:txBody>
+          <a:bodyPr xmlns:a="http://schemas.openxmlformats.org/drawingml/2006/main" wrap="square" lIns="0" tIns="0" rIns="0" bIns="0" anchor="t"/>
+          <a:lstStyle xmlns:a="http://schemas.openxmlformats.org/drawingml/2006/main"/>
+          <a:p xmlns:a="http://schemas.openxmlformats.org/drawingml/2006/main">
+            <a:r>
+              <a:rPr lang="en-US" sz="2100" b="1">
+                <a:solidFill>
+                  <a:srgbClr val="17324B"/>
+                </a:solidFill>
+                <a:latin typeface="Arial"/>
+                <a:ea typeface="Arial"/>
+              </a:rPr>
+              <a:t>The geography changes the decision.</a:t>
+            </a:r>
+            <a:endParaRPr lang="en-US"/>
+          </a:p>
+        </p:txBody>
+      </p:sp>
+      <p:sp>
+        <p:nvSpPr>
+          <p:cNvPr id="26" name="map-read-body"/>
+          <p:cNvSpPr txBox="1"/>
+          <p:nvPr/>
+        </p:nvSpPr>
+        <p:spPr>
+          <a:xfrm xmlns:a="http://schemas.openxmlformats.org/drawingml/2006/main">
+            <a:off x="9906000" y="4953000"/>
+            <a:ext cx="3429000" cy="895350"/>
+          </a:xfrm>
+          <a:prstGeom xmlns:a="http://schemas.openxmlformats.org/drawingml/2006/main" prst="rect">
+            <a:avLst/>
+          </a:prstGeom>
+          <a:noFill xmlns:a="http://schemas.openxmlformats.org/drawingml/2006/main"/>
+          <a:ln xmlns:a="http://schemas.openxmlformats.org/drawingml/2006/main" w="0">
+            <a:noFill/>
+          </a:ln>
+        </p:spPr>
+        <p:txBody>
+          <a:bodyPr xmlns:a="http://schemas.openxmlformats.org/drawingml/2006/main" wrap="square" lIns="0" tIns="0" rIns="0" bIns="0" anchor="t"/>
+          <a:lstStyle xmlns:a="http://schemas.openxmlformats.org/drawingml/2006/main"/>
+          <a:p xmlns:a="http://schemas.openxmlformats.org/drawingml/2006/main">
+            <a:r>
+              <a:rPr lang="en-US" sz="1275">
+                <a:solidFill>
+                  <a:srgbClr val="909DA9"/>
+                </a:solidFill>
+                <a:latin typeface="Arial"/>
+                <a:ea typeface="Arial"/>
+              </a:rPr>
+              <a:t>Use a map only when position, distribution, or concentration carries the argument. Direct labels stay next to the region they qualify.</a:t>
+            </a:r>
+            <a:endParaRPr lang="en-US"/>
+          </a:p>
+        </p:txBody>
+      </p:sp>
+      <p:sp>
+        <p:nvSpPr>
+          <p:cNvPr id="27" name="evidence-band"/>
           <p:cNvSpPr/>
           <p:nvPr/>
         </p:nvSpPr>
@@ -2447,7 +2823,7 @@
       </p:sp>
       <p:sp>
         <p:nvSpPr>
-          <p:cNvPr id="14" name="evidence-band-text"/>
+          <p:cNvPr id="28" name="evidence-band-text"/>
           <p:cNvSpPr txBox="1"/>
           <p:nvPr/>
         </p:nvSpPr>
@@ -2484,7 +2860,7 @@
       </p:sp>
       <p:sp>
         <p:nvSpPr>
-          <p:cNvPr id="15" name="source"/>
+          <p:cNvPr id="29" name="source"/>
           <p:cNvSpPr txBox="1"/>
           <p:nvPr/>
         </p:nvSpPr>
@@ -2521,7 +2897,7 @@
       </p:sp>
       <p:sp>
         <p:nvSpPr>
-          <p:cNvPr id="16" name="page-number"/>
+          <p:cNvPr id="30" name="page-number"/>
           <p:cNvSpPr txBox="1"/>
           <p:nvPr/>
         </p:nvSpPr>
@@ -3725,7 +4101,7 @@
     <p:bg>
       <p:bgPr>
         <a:blipFill xmlns:a="http://schemas.openxmlformats.org/drawingml/2006/main">
-          <a:blip xmlns:r="http://schemas.openxmlformats.org/officeDocument/2006/relationships" r:embed="rIdOfficeKitImage083106afebc7d419_1"/>
+          <a:blip xmlns:r="http://schemas.openxmlformats.org/officeDocument/2006/relationships" r:embed="rIdOfficeKitImage10e4539a68783891_1"/>
           <a:stretch>
             <a:fillRect/>
           </a:stretch>
